--- a/exports/pptx/lessons/middle-module-04-doshas/day-09-project-session-2.pptx
+++ b/exports/pptx/lessons/middle-module-04-doshas/day-09-project-session-2.pptx
@@ -14,9 +14,16 @@
     <p:sldId id="262" r:id="rId8"/>
     <p:sldId id="263" r:id="rId9"/>
     <p:sldId id="264" r:id="rId10"/>
+    <p:sldId id="265" r:id="rId11"/>
+    <p:sldId id="266" r:id="rId12"/>
+    <p:sldId id="267" r:id="rId13"/>
+    <p:sldId id="268" r:id="rId14"/>
+    <p:sldId id="269" r:id="rId15"/>
+    <p:sldId id="270" r:id="rId16"/>
+    <p:sldId id="271" r:id="rId17"/>
   </p:sldIdLst>
   <p:notesMasterIdLst>
-    <p:notesMasterId r:id="rId11"/>
+    <p:notesMasterId r:id="rId18"/>
   </p:notesMasterIdLst>
   <p:sldSz cx="9144000" cy="5143500"/>
   <p:notesSz cx="5143500" cy="9144000"/>
@@ -534,6 +541,622 @@
             <a:fld id="{F7021451-1387-4CA6-816F-3879F97B5CBC}" type="slidenum">
               <a:rPr lang="en-US"/>
               <a:t>1</a:t>
+            </a:fld>
+            <a:endParaRPr lang="en-US"/>
+          </a:p>
+        </p:txBody>
+      </p:sp>
+    </p:spTree>
+    <p:extLst>
+      <p:ext uri="{BB962C8B-B14F-4D97-AF65-F5344CB8AC3E}">
+        <p14:creationId xmlns:p14="http://schemas.microsoft.com/office/powerpoint/2010/main" val="1024086991"/>
+      </p:ext>
+    </p:extLst>
+  </p:cSld>
+  <p:clrMapOvr>
+    <a:masterClrMapping/>
+  </p:clrMapOvr>
+</p:notes>
+</file>
+
+<file path=ppt/notesSlides/notesSlide10.xml><?xml version="1.0" encoding="utf-8"?>
+<p:notes xmlns:a="http://schemas.openxmlformats.org/drawingml/2006/main" xmlns:r="http://schemas.openxmlformats.org/officeDocument/2006/relationships" xmlns:p="http://schemas.openxmlformats.org/presentationml/2006/main">
+  <p:cSld>
+    <p:spTree>
+      <p:nvGrpSpPr>
+        <p:cNvPr id="1" name=""/>
+        <p:cNvGrpSpPr/>
+        <p:nvPr/>
+      </p:nvGrpSpPr>
+      <p:grpSpPr>
+        <a:xfrm>
+          <a:off x="0" y="0"/>
+          <a:ext cx="0" cy="0"/>
+          <a:chOff x="0" y="0"/>
+          <a:chExt cx="0" cy="0"/>
+        </a:xfrm>
+      </p:grpSpPr>
+      <p:sp>
+        <p:nvSpPr>
+          <p:cNvPr id="2" name="Slide Image Placeholder 1"/>
+          <p:cNvSpPr>
+            <a:spLocks noGrp="1" noRot="1" noChangeAspect="1"/>
+          </p:cNvSpPr>
+          <p:nvPr>
+            <p:ph type="sldImg"/>
+          </p:nvPr>
+        </p:nvSpPr>
+        <p:spPr/>
+      </p:sp>
+      <p:sp>
+        <p:nvSpPr>
+          <p:cNvPr id="3" name="Notes Placeholder 2"/>
+          <p:cNvSpPr>
+            <a:spLocks noGrp="1"/>
+          </p:cNvSpPr>
+          <p:nvPr>
+            <p:ph type="body" idx="1"/>
+          </p:nvPr>
+        </p:nvSpPr>
+        <p:spPr/>
+        <p:txBody>
+          <a:bodyPr/>
+          <a:lstStyle/>
+          <a:p>
+            <a:r>
+              <a:rPr lang="en-US" dirty="0"/>
+              <a:t/>
+            </a:r>
+            <a:endParaRPr lang="en-US" dirty="0"/>
+          </a:p>
+        </p:txBody>
+      </p:sp>
+      <p:sp>
+        <p:nvSpPr>
+          <p:cNvPr id="4" name="Slide Number Placeholder 3"/>
+          <p:cNvSpPr>
+            <a:spLocks noGrp="1"/>
+          </p:cNvSpPr>
+          <p:nvPr>
+            <p:ph type="sldNum" sz="quarter" idx="10"/>
+          </p:nvPr>
+        </p:nvSpPr>
+        <p:spPr/>
+        <p:txBody>
+          <a:bodyPr/>
+          <a:lstStyle/>
+          <a:p>
+            <a:fld id="{F7021451-1387-4CA6-816F-3879F97B5CBC}" type="slidenum">
+              <a:rPr lang="en-US"/>
+              <a:t>10</a:t>
+            </a:fld>
+            <a:endParaRPr lang="en-US"/>
+          </a:p>
+        </p:txBody>
+      </p:sp>
+    </p:spTree>
+    <p:extLst>
+      <p:ext uri="{BB962C8B-B14F-4D97-AF65-F5344CB8AC3E}">
+        <p14:creationId xmlns:p14="http://schemas.microsoft.com/office/powerpoint/2010/main" val="1024086991"/>
+      </p:ext>
+    </p:extLst>
+  </p:cSld>
+  <p:clrMapOvr>
+    <a:masterClrMapping/>
+  </p:clrMapOvr>
+</p:notes>
+</file>
+
+<file path=ppt/notesSlides/notesSlide11.xml><?xml version="1.0" encoding="utf-8"?>
+<p:notes xmlns:a="http://schemas.openxmlformats.org/drawingml/2006/main" xmlns:r="http://schemas.openxmlformats.org/officeDocument/2006/relationships" xmlns:p="http://schemas.openxmlformats.org/presentationml/2006/main">
+  <p:cSld>
+    <p:spTree>
+      <p:nvGrpSpPr>
+        <p:cNvPr id="1" name=""/>
+        <p:cNvGrpSpPr/>
+        <p:nvPr/>
+      </p:nvGrpSpPr>
+      <p:grpSpPr>
+        <a:xfrm>
+          <a:off x="0" y="0"/>
+          <a:ext cx="0" cy="0"/>
+          <a:chOff x="0" y="0"/>
+          <a:chExt cx="0" cy="0"/>
+        </a:xfrm>
+      </p:grpSpPr>
+      <p:sp>
+        <p:nvSpPr>
+          <p:cNvPr id="2" name="Slide Image Placeholder 1"/>
+          <p:cNvSpPr>
+            <a:spLocks noGrp="1" noRot="1" noChangeAspect="1"/>
+          </p:cNvSpPr>
+          <p:nvPr>
+            <p:ph type="sldImg"/>
+          </p:nvPr>
+        </p:nvSpPr>
+        <p:spPr/>
+      </p:sp>
+      <p:sp>
+        <p:nvSpPr>
+          <p:cNvPr id="3" name="Notes Placeholder 2"/>
+          <p:cNvSpPr>
+            <a:spLocks noGrp="1"/>
+          </p:cNvSpPr>
+          <p:nvPr>
+            <p:ph type="body" idx="1"/>
+          </p:nvPr>
+        </p:nvSpPr>
+        <p:spPr/>
+        <p:txBody>
+          <a:bodyPr/>
+          <a:lstStyle/>
+          <a:p>
+            <a:r>
+              <a:rPr lang="en-US" dirty="0"/>
+              <a:t/>
+            </a:r>
+            <a:endParaRPr lang="en-US" dirty="0"/>
+          </a:p>
+        </p:txBody>
+      </p:sp>
+      <p:sp>
+        <p:nvSpPr>
+          <p:cNvPr id="4" name="Slide Number Placeholder 3"/>
+          <p:cNvSpPr>
+            <a:spLocks noGrp="1"/>
+          </p:cNvSpPr>
+          <p:nvPr>
+            <p:ph type="sldNum" sz="quarter" idx="10"/>
+          </p:nvPr>
+        </p:nvSpPr>
+        <p:spPr/>
+        <p:txBody>
+          <a:bodyPr/>
+          <a:lstStyle/>
+          <a:p>
+            <a:fld id="{F7021451-1387-4CA6-816F-3879F97B5CBC}" type="slidenum">
+              <a:rPr lang="en-US"/>
+              <a:t>11</a:t>
+            </a:fld>
+            <a:endParaRPr lang="en-US"/>
+          </a:p>
+        </p:txBody>
+      </p:sp>
+    </p:spTree>
+    <p:extLst>
+      <p:ext uri="{BB962C8B-B14F-4D97-AF65-F5344CB8AC3E}">
+        <p14:creationId xmlns:p14="http://schemas.microsoft.com/office/powerpoint/2010/main" val="1024086991"/>
+      </p:ext>
+    </p:extLst>
+  </p:cSld>
+  <p:clrMapOvr>
+    <a:masterClrMapping/>
+  </p:clrMapOvr>
+</p:notes>
+</file>
+
+<file path=ppt/notesSlides/notesSlide12.xml><?xml version="1.0" encoding="utf-8"?>
+<p:notes xmlns:a="http://schemas.openxmlformats.org/drawingml/2006/main" xmlns:r="http://schemas.openxmlformats.org/officeDocument/2006/relationships" xmlns:p="http://schemas.openxmlformats.org/presentationml/2006/main">
+  <p:cSld>
+    <p:spTree>
+      <p:nvGrpSpPr>
+        <p:cNvPr id="1" name=""/>
+        <p:cNvGrpSpPr/>
+        <p:nvPr/>
+      </p:nvGrpSpPr>
+      <p:grpSpPr>
+        <a:xfrm>
+          <a:off x="0" y="0"/>
+          <a:ext cx="0" cy="0"/>
+          <a:chOff x="0" y="0"/>
+          <a:chExt cx="0" cy="0"/>
+        </a:xfrm>
+      </p:grpSpPr>
+      <p:sp>
+        <p:nvSpPr>
+          <p:cNvPr id="2" name="Slide Image Placeholder 1"/>
+          <p:cNvSpPr>
+            <a:spLocks noGrp="1" noRot="1" noChangeAspect="1"/>
+          </p:cNvSpPr>
+          <p:nvPr>
+            <p:ph type="sldImg"/>
+          </p:nvPr>
+        </p:nvSpPr>
+        <p:spPr/>
+      </p:sp>
+      <p:sp>
+        <p:nvSpPr>
+          <p:cNvPr id="3" name="Notes Placeholder 2"/>
+          <p:cNvSpPr>
+            <a:spLocks noGrp="1"/>
+          </p:cNvSpPr>
+          <p:nvPr>
+            <p:ph type="body" idx="1"/>
+          </p:nvPr>
+        </p:nvSpPr>
+        <p:spPr/>
+        <p:txBody>
+          <a:bodyPr/>
+          <a:lstStyle/>
+          <a:p>
+            <a:r>
+              <a:rPr lang="en-US" dirty="0"/>
+              <a:t/>
+            </a:r>
+            <a:endParaRPr lang="en-US" dirty="0"/>
+          </a:p>
+        </p:txBody>
+      </p:sp>
+      <p:sp>
+        <p:nvSpPr>
+          <p:cNvPr id="4" name="Slide Number Placeholder 3"/>
+          <p:cNvSpPr>
+            <a:spLocks noGrp="1"/>
+          </p:cNvSpPr>
+          <p:nvPr>
+            <p:ph type="sldNum" sz="quarter" idx="10"/>
+          </p:nvPr>
+        </p:nvSpPr>
+        <p:spPr/>
+        <p:txBody>
+          <a:bodyPr/>
+          <a:lstStyle/>
+          <a:p>
+            <a:fld id="{F7021451-1387-4CA6-816F-3879F97B5CBC}" type="slidenum">
+              <a:rPr lang="en-US"/>
+              <a:t>12</a:t>
+            </a:fld>
+            <a:endParaRPr lang="en-US"/>
+          </a:p>
+        </p:txBody>
+      </p:sp>
+    </p:spTree>
+    <p:extLst>
+      <p:ext uri="{BB962C8B-B14F-4D97-AF65-F5344CB8AC3E}">
+        <p14:creationId xmlns:p14="http://schemas.microsoft.com/office/powerpoint/2010/main" val="1024086991"/>
+      </p:ext>
+    </p:extLst>
+  </p:cSld>
+  <p:clrMapOvr>
+    <a:masterClrMapping/>
+  </p:clrMapOvr>
+</p:notes>
+</file>
+
+<file path=ppt/notesSlides/notesSlide13.xml><?xml version="1.0" encoding="utf-8"?>
+<p:notes xmlns:a="http://schemas.openxmlformats.org/drawingml/2006/main" xmlns:r="http://schemas.openxmlformats.org/officeDocument/2006/relationships" xmlns:p="http://schemas.openxmlformats.org/presentationml/2006/main">
+  <p:cSld>
+    <p:spTree>
+      <p:nvGrpSpPr>
+        <p:cNvPr id="1" name=""/>
+        <p:cNvGrpSpPr/>
+        <p:nvPr/>
+      </p:nvGrpSpPr>
+      <p:grpSpPr>
+        <a:xfrm>
+          <a:off x="0" y="0"/>
+          <a:ext cx="0" cy="0"/>
+          <a:chOff x="0" y="0"/>
+          <a:chExt cx="0" cy="0"/>
+        </a:xfrm>
+      </p:grpSpPr>
+      <p:sp>
+        <p:nvSpPr>
+          <p:cNvPr id="2" name="Slide Image Placeholder 1"/>
+          <p:cNvSpPr>
+            <a:spLocks noGrp="1" noRot="1" noChangeAspect="1"/>
+          </p:cNvSpPr>
+          <p:nvPr>
+            <p:ph type="sldImg"/>
+          </p:nvPr>
+        </p:nvSpPr>
+        <p:spPr/>
+      </p:sp>
+      <p:sp>
+        <p:nvSpPr>
+          <p:cNvPr id="3" name="Notes Placeholder 2"/>
+          <p:cNvSpPr>
+            <a:spLocks noGrp="1"/>
+          </p:cNvSpPr>
+          <p:nvPr>
+            <p:ph type="body" idx="1"/>
+          </p:nvPr>
+        </p:nvSpPr>
+        <p:spPr/>
+        <p:txBody>
+          <a:bodyPr/>
+          <a:lstStyle/>
+          <a:p>
+            <a:r>
+              <a:rPr lang="en-US" dirty="0"/>
+              <a:t/>
+            </a:r>
+            <a:endParaRPr lang="en-US" dirty="0"/>
+          </a:p>
+        </p:txBody>
+      </p:sp>
+      <p:sp>
+        <p:nvSpPr>
+          <p:cNvPr id="4" name="Slide Number Placeholder 3"/>
+          <p:cNvSpPr>
+            <a:spLocks noGrp="1"/>
+          </p:cNvSpPr>
+          <p:nvPr>
+            <p:ph type="sldNum" sz="quarter" idx="10"/>
+          </p:nvPr>
+        </p:nvSpPr>
+        <p:spPr/>
+        <p:txBody>
+          <a:bodyPr/>
+          <a:lstStyle/>
+          <a:p>
+            <a:fld id="{F7021451-1387-4CA6-816F-3879F97B5CBC}" type="slidenum">
+              <a:rPr lang="en-US"/>
+              <a:t>13</a:t>
+            </a:fld>
+            <a:endParaRPr lang="en-US"/>
+          </a:p>
+        </p:txBody>
+      </p:sp>
+    </p:spTree>
+    <p:extLst>
+      <p:ext uri="{BB962C8B-B14F-4D97-AF65-F5344CB8AC3E}">
+        <p14:creationId xmlns:p14="http://schemas.microsoft.com/office/powerpoint/2010/main" val="1024086991"/>
+      </p:ext>
+    </p:extLst>
+  </p:cSld>
+  <p:clrMapOvr>
+    <a:masterClrMapping/>
+  </p:clrMapOvr>
+</p:notes>
+</file>
+
+<file path=ppt/notesSlides/notesSlide14.xml><?xml version="1.0" encoding="utf-8"?>
+<p:notes xmlns:a="http://schemas.openxmlformats.org/drawingml/2006/main" xmlns:r="http://schemas.openxmlformats.org/officeDocument/2006/relationships" xmlns:p="http://schemas.openxmlformats.org/presentationml/2006/main">
+  <p:cSld>
+    <p:spTree>
+      <p:nvGrpSpPr>
+        <p:cNvPr id="1" name=""/>
+        <p:cNvGrpSpPr/>
+        <p:nvPr/>
+      </p:nvGrpSpPr>
+      <p:grpSpPr>
+        <a:xfrm>
+          <a:off x="0" y="0"/>
+          <a:ext cx="0" cy="0"/>
+          <a:chOff x="0" y="0"/>
+          <a:chExt cx="0" cy="0"/>
+        </a:xfrm>
+      </p:grpSpPr>
+      <p:sp>
+        <p:nvSpPr>
+          <p:cNvPr id="2" name="Slide Image Placeholder 1"/>
+          <p:cNvSpPr>
+            <a:spLocks noGrp="1" noRot="1" noChangeAspect="1"/>
+          </p:cNvSpPr>
+          <p:nvPr>
+            <p:ph type="sldImg"/>
+          </p:nvPr>
+        </p:nvSpPr>
+        <p:spPr/>
+      </p:sp>
+      <p:sp>
+        <p:nvSpPr>
+          <p:cNvPr id="3" name="Notes Placeholder 2"/>
+          <p:cNvSpPr>
+            <a:spLocks noGrp="1"/>
+          </p:cNvSpPr>
+          <p:nvPr>
+            <p:ph type="body" idx="1"/>
+          </p:nvPr>
+        </p:nvSpPr>
+        <p:spPr/>
+        <p:txBody>
+          <a:bodyPr/>
+          <a:lstStyle/>
+          <a:p>
+            <a:r>
+              <a:rPr lang="en-US" dirty="0"/>
+              <a:t/>
+            </a:r>
+            <a:endParaRPr lang="en-US" dirty="0"/>
+          </a:p>
+        </p:txBody>
+      </p:sp>
+      <p:sp>
+        <p:nvSpPr>
+          <p:cNvPr id="4" name="Slide Number Placeholder 3"/>
+          <p:cNvSpPr>
+            <a:spLocks noGrp="1"/>
+          </p:cNvSpPr>
+          <p:nvPr>
+            <p:ph type="sldNum" sz="quarter" idx="10"/>
+          </p:nvPr>
+        </p:nvSpPr>
+        <p:spPr/>
+        <p:txBody>
+          <a:bodyPr/>
+          <a:lstStyle/>
+          <a:p>
+            <a:fld id="{F7021451-1387-4CA6-816F-3879F97B5CBC}" type="slidenum">
+              <a:rPr lang="en-US"/>
+              <a:t>14</a:t>
+            </a:fld>
+            <a:endParaRPr lang="en-US"/>
+          </a:p>
+        </p:txBody>
+      </p:sp>
+    </p:spTree>
+    <p:extLst>
+      <p:ext uri="{BB962C8B-B14F-4D97-AF65-F5344CB8AC3E}">
+        <p14:creationId xmlns:p14="http://schemas.microsoft.com/office/powerpoint/2010/main" val="1024086991"/>
+      </p:ext>
+    </p:extLst>
+  </p:cSld>
+  <p:clrMapOvr>
+    <a:masterClrMapping/>
+  </p:clrMapOvr>
+</p:notes>
+</file>
+
+<file path=ppt/notesSlides/notesSlide15.xml><?xml version="1.0" encoding="utf-8"?>
+<p:notes xmlns:a="http://schemas.openxmlformats.org/drawingml/2006/main" xmlns:r="http://schemas.openxmlformats.org/officeDocument/2006/relationships" xmlns:p="http://schemas.openxmlformats.org/presentationml/2006/main">
+  <p:cSld>
+    <p:spTree>
+      <p:nvGrpSpPr>
+        <p:cNvPr id="1" name=""/>
+        <p:cNvGrpSpPr/>
+        <p:nvPr/>
+      </p:nvGrpSpPr>
+      <p:grpSpPr>
+        <a:xfrm>
+          <a:off x="0" y="0"/>
+          <a:ext cx="0" cy="0"/>
+          <a:chOff x="0" y="0"/>
+          <a:chExt cx="0" cy="0"/>
+        </a:xfrm>
+      </p:grpSpPr>
+      <p:sp>
+        <p:nvSpPr>
+          <p:cNvPr id="2" name="Slide Image Placeholder 1"/>
+          <p:cNvSpPr>
+            <a:spLocks noGrp="1" noRot="1" noChangeAspect="1"/>
+          </p:cNvSpPr>
+          <p:nvPr>
+            <p:ph type="sldImg"/>
+          </p:nvPr>
+        </p:nvSpPr>
+        <p:spPr/>
+      </p:sp>
+      <p:sp>
+        <p:nvSpPr>
+          <p:cNvPr id="3" name="Notes Placeholder 2"/>
+          <p:cNvSpPr>
+            <a:spLocks noGrp="1"/>
+          </p:cNvSpPr>
+          <p:nvPr>
+            <p:ph type="body" idx="1"/>
+          </p:nvPr>
+        </p:nvSpPr>
+        <p:spPr/>
+        <p:txBody>
+          <a:bodyPr/>
+          <a:lstStyle/>
+          <a:p>
+            <a:r>
+              <a:rPr lang="en-US" dirty="0"/>
+              <a:t/>
+            </a:r>
+            <a:endParaRPr lang="en-US" dirty="0"/>
+          </a:p>
+        </p:txBody>
+      </p:sp>
+      <p:sp>
+        <p:nvSpPr>
+          <p:cNvPr id="4" name="Slide Number Placeholder 3"/>
+          <p:cNvSpPr>
+            <a:spLocks noGrp="1"/>
+          </p:cNvSpPr>
+          <p:nvPr>
+            <p:ph type="sldNum" sz="quarter" idx="10"/>
+          </p:nvPr>
+        </p:nvSpPr>
+        <p:spPr/>
+        <p:txBody>
+          <a:bodyPr/>
+          <a:lstStyle/>
+          <a:p>
+            <a:fld id="{F7021451-1387-4CA6-816F-3879F97B5CBC}" type="slidenum">
+              <a:rPr lang="en-US"/>
+              <a:t>15</a:t>
+            </a:fld>
+            <a:endParaRPr lang="en-US"/>
+          </a:p>
+        </p:txBody>
+      </p:sp>
+    </p:spTree>
+    <p:extLst>
+      <p:ext uri="{BB962C8B-B14F-4D97-AF65-F5344CB8AC3E}">
+        <p14:creationId xmlns:p14="http://schemas.microsoft.com/office/powerpoint/2010/main" val="1024086991"/>
+      </p:ext>
+    </p:extLst>
+  </p:cSld>
+  <p:clrMapOvr>
+    <a:masterClrMapping/>
+  </p:clrMapOvr>
+</p:notes>
+</file>
+
+<file path=ppt/notesSlides/notesSlide16.xml><?xml version="1.0" encoding="utf-8"?>
+<p:notes xmlns:a="http://schemas.openxmlformats.org/drawingml/2006/main" xmlns:r="http://schemas.openxmlformats.org/officeDocument/2006/relationships" xmlns:p="http://schemas.openxmlformats.org/presentationml/2006/main">
+  <p:cSld>
+    <p:spTree>
+      <p:nvGrpSpPr>
+        <p:cNvPr id="1" name=""/>
+        <p:cNvGrpSpPr/>
+        <p:nvPr/>
+      </p:nvGrpSpPr>
+      <p:grpSpPr>
+        <a:xfrm>
+          <a:off x="0" y="0"/>
+          <a:ext cx="0" cy="0"/>
+          <a:chOff x="0" y="0"/>
+          <a:chExt cx="0" cy="0"/>
+        </a:xfrm>
+      </p:grpSpPr>
+      <p:sp>
+        <p:nvSpPr>
+          <p:cNvPr id="2" name="Slide Image Placeholder 1"/>
+          <p:cNvSpPr>
+            <a:spLocks noGrp="1" noRot="1" noChangeAspect="1"/>
+          </p:cNvSpPr>
+          <p:nvPr>
+            <p:ph type="sldImg"/>
+          </p:nvPr>
+        </p:nvSpPr>
+        <p:spPr/>
+      </p:sp>
+      <p:sp>
+        <p:nvSpPr>
+          <p:cNvPr id="3" name="Notes Placeholder 2"/>
+          <p:cNvSpPr>
+            <a:spLocks noGrp="1"/>
+          </p:cNvSpPr>
+          <p:nvPr>
+            <p:ph type="body" idx="1"/>
+          </p:nvPr>
+        </p:nvSpPr>
+        <p:spPr/>
+        <p:txBody>
+          <a:bodyPr/>
+          <a:lstStyle/>
+          <a:p>
+            <a:r>
+              <a:rPr lang="en-US" dirty="0"/>
+              <a:t/>
+            </a:r>
+            <a:endParaRPr lang="en-US" dirty="0"/>
+          </a:p>
+        </p:txBody>
+      </p:sp>
+      <p:sp>
+        <p:nvSpPr>
+          <p:cNvPr id="4" name="Slide Number Placeholder 3"/>
+          <p:cNvSpPr>
+            <a:spLocks noGrp="1"/>
+          </p:cNvSpPr>
+          <p:nvPr>
+            <p:ph type="sldNum" sz="quarter" idx="10"/>
+          </p:nvPr>
+        </p:nvSpPr>
+        <p:spPr/>
+        <p:txBody>
+          <a:bodyPr/>
+          <a:lstStyle/>
+          <a:p>
+            <a:fld id="{F7021451-1387-4CA6-816F-3879F97B5CBC}" type="slidenum">
+              <a:rPr lang="en-US"/>
+              <a:t>16</a:t>
             </a:fld>
             <a:endParaRPr lang="en-US"/>
           </a:p>
@@ -1833,7 +2456,117 @@
         </p:nvSpPr>
         <p:spPr>
           <a:xfrm>
-            <a:off x="406301" y="1223963"/>
+            <a:off x="406301" y="4434929"/>
+            <a:ext cx="8498026" cy="213271"/>
+          </a:xfrm>
+          <a:prstGeom prst="rect">
+            <a:avLst/>
+          </a:prstGeom>
+          <a:noFill/>
+          <a:ln/>
+        </p:spPr>
+        <p:txBody>
+          <a:bodyPr wrap="square" lIns="0" tIns="0" rIns="0" bIns="0" rtlCol="0" anchor="t"/>
+          <a:lstStyle/>
+          <a:p>
+            <a:pPr algn="l" indent="0" marL="0">
+              <a:lnSpc>
+                <a:spcPts val="1680"/>
+              </a:lnSpc>
+              <a:spcBef>
+                <a:spcPts val="300"/>
+              </a:spcBef>
+              <a:spcAft>
+                <a:spcPts val="300"/>
+              </a:spcAft>
+              <a:buNone/>
+            </a:pPr>
+            <a:r>
+              <a:rPr lang="en-US" sz="1200" dirty="0">
+                <a:solidFill>
+                  <a:srgbClr val="1C2833"/>
+                </a:solidFill>
+                <a:latin typeface="Arial" pitchFamily="34" charset="0"/>
+                <a:ea typeface="Arial" pitchFamily="34" charset="-122"/>
+                <a:cs typeface="Arial" pitchFamily="34" charset="-120"/>
+              </a:rPr>
+              <a:t>Middle ·  · IKS Curriculum</a:t>
+            </a:r>
+            <a:endParaRPr lang="en-US" sz="1200" dirty="0"/>
+          </a:p>
+        </p:txBody>
+      </p:sp>
+    </p:spTree>
+  </p:cSld>
+  <p:clrMapOvr>
+    <a:masterClrMapping/>
+  </p:clrMapOvr>
+</p:sld>
+</file>
+
+<file path=ppt/slides/slide10.xml><?xml version="1.0" encoding="utf-8"?>
+<p:sld xmlns:a="http://schemas.openxmlformats.org/drawingml/2006/main" xmlns:r="http://schemas.openxmlformats.org/officeDocument/2006/relationships" xmlns:p="http://schemas.openxmlformats.org/presentationml/2006/main">
+  <p:cSld name="Slide 10">
+    <p:bg>
+      <p:bgPr>
+        <a:solidFill>
+          <a:srgbClr val="FFFFFF"/>
+        </a:solidFill>
+      </p:bgPr>
+    </p:bg>
+    <p:spTree>
+      <p:nvGrpSpPr>
+        <p:cNvPr id="1" name=""/>
+        <p:cNvGrpSpPr/>
+        <p:nvPr/>
+      </p:nvGrpSpPr>
+      <p:grpSpPr>
+        <a:xfrm>
+          <a:off x="0" y="0"/>
+          <a:ext cx="0" cy="0"/>
+          <a:chOff x="0" y="0"/>
+          <a:chExt cx="0" cy="0"/>
+        </a:xfrm>
+      </p:grpSpPr>
+      <p:sp>
+        <p:nvSpPr>
+          <p:cNvPr id="2" name="Text 0"/>
+          <p:cNvSpPr/>
+          <p:nvPr/>
+        </p:nvSpPr>
+        <p:spPr>
+          <a:xfrm>
+            <a:off x="0" y="0"/>
+            <a:ext cx="9144000" cy="101501"/>
+          </a:xfrm>
+          <a:prstGeom prst="rect">
+            <a:avLst/>
+          </a:prstGeom>
+          <a:solidFill>
+            <a:srgbClr val="277884"/>
+          </a:solidFill>
+          <a:ln/>
+        </p:spPr>
+        <p:txBody>
+          <a:bodyPr wrap="square" rtlCol="0" anchor="ctr"/>
+          <a:lstStyle/>
+          <a:p>
+            <a:pPr indent="0" marL="0">
+              <a:buNone/>
+            </a:pPr>
+            <a:endParaRPr lang="en-US" dirty="0"/>
+          </a:p>
+        </p:txBody>
+      </p:sp>
+      <p:sp>
+        <p:nvSpPr>
+          <p:cNvPr id="3" name="Text 1"/>
+          <p:cNvSpPr/>
+          <p:nvPr/>
+        </p:nvSpPr>
+        <p:spPr>
+          <a:xfrm>
+            <a:off x="406301" y="457051"/>
             <a:ext cx="8498026" cy="274290"/>
           </a:xfrm>
           <a:prstGeom prst="rect">
@@ -1867,7 +2600,7 @@
                 <a:ea typeface="Georgia" pitchFamily="34" charset="-122"/>
                 <a:cs typeface="Georgia" pitchFamily="34" charset="-120"/>
               </a:rPr>
-              <a:t>Learning objective</a:t>
+              <a:t>Core (35 min) — Build + rehearse (cont.)</a:t>
             </a:r>
             <a:endParaRPr lang="en-US" sz="1800" dirty="0"/>
           </a:p>
@@ -1875,14 +2608,14 @@
       </p:sp>
       <p:sp>
         <p:nvSpPr>
-          <p:cNvPr id="6" name="Text 4"/>
-          <p:cNvSpPr/>
-          <p:nvPr/>
-        </p:nvSpPr>
-        <p:spPr>
-          <a:xfrm>
-            <a:off x="406301" y="1637854"/>
-            <a:ext cx="8498026" cy="426541"/>
+          <p:cNvPr id="4" name="Text 2"/>
+          <p:cNvSpPr/>
+          <p:nvPr/>
+        </p:nvSpPr>
+        <p:spPr>
+          <a:xfrm>
+            <a:off x="634901" y="883593"/>
+            <a:ext cx="8102798" cy="1257002"/>
           </a:xfrm>
           <a:prstGeom prst="rect">
             <a:avLst/>
@@ -1894,6 +2627,188 @@
           <a:bodyPr wrap="square" lIns="0" tIns="0" rIns="0" bIns="0" rtlCol="0" anchor="t"/>
           <a:lstStyle/>
           <a:p>
+            <a:pPr algn="l" marL="342900" indent="-342900">
+              <a:lnSpc>
+                <a:spcPts val="1620"/>
+              </a:lnSpc>
+              <a:spcAft>
+                <a:spcPts val="300"/>
+              </a:spcAft>
+              <a:buSzPct val="100000"/>
+              <a:buChar char="•"/>
+            </a:pPr>
+            <a:r>
+              <a:rPr lang="en-US" sz="1200" dirty="0">
+                <a:solidFill>
+                  <a:srgbClr val="1C2833"/>
+                </a:solidFill>
+                <a:latin typeface="Arial" pitchFamily="34" charset="0"/>
+                <a:ea typeface="Arial" pitchFamily="34" charset="-122"/>
+                <a:cs typeface="Arial" pitchFamily="34" charset="-120"/>
+              </a:rPr>
+              <a:t>In pairs. Each student presents to their partner. Use the 3-minute timer.</a:t>
+            </a:r>
+            <a:endParaRPr lang="en-US" sz="1200" dirty="0"/>
+          </a:p>
+          <a:p>
+            <a:pPr algn="l" marL="342900" indent="-342900">
+              <a:lnSpc>
+                <a:spcPts val="1620"/>
+              </a:lnSpc>
+              <a:spcAft>
+                <a:spcPts val="300"/>
+              </a:spcAft>
+              <a:buSzPct val="100000"/>
+              <a:buChar char="•"/>
+            </a:pPr>
+            <a:r>
+              <a:rPr lang="en-US" sz="1200" dirty="0">
+                <a:solidFill>
+                  <a:srgbClr val="1C2833"/>
+                </a:solidFill>
+                <a:latin typeface="Arial" pitchFamily="34" charset="0"/>
+                <a:ea typeface="Arial" pitchFamily="34" charset="-122"/>
+                <a:cs typeface="Arial" pitchFamily="34" charset="-120"/>
+              </a:rPr>
+              <a:t>Partner gives ONE piece of feedback:</a:t>
+            </a:r>
+            <a:endParaRPr lang="en-US" sz="1200" dirty="0"/>
+          </a:p>
+          <a:p>
+            <a:pPr algn="l" marL="342900" indent="-342900">
+              <a:lnSpc>
+                <a:spcPts val="1620"/>
+              </a:lnSpc>
+              <a:spcAft>
+                <a:spcPts val="300"/>
+              </a:spcAft>
+              <a:buSzPct val="100000"/>
+              <a:buChar char="•"/>
+            </a:pPr>
+            <a:r>
+              <a:rPr lang="en-US" sz="1200" dirty="0">
+                <a:solidFill>
+                  <a:srgbClr val="1C2833"/>
+                </a:solidFill>
+                <a:latin typeface="Arial" pitchFamily="34" charset="0"/>
+                <a:ea typeface="Arial" pitchFamily="34" charset="-122"/>
+                <a:cs typeface="Arial" pitchFamily="34" charset="-120"/>
+              </a:rPr>
+              <a:t>"I didn't catch your citation — say it slower."</a:t>
+            </a:r>
+            <a:endParaRPr lang="en-US" sz="1200" dirty="0"/>
+          </a:p>
+          <a:p>
+            <a:pPr algn="l" marL="342900" indent="-342900">
+              <a:lnSpc>
+                <a:spcPts val="1620"/>
+              </a:lnSpc>
+              <a:spcAft>
+                <a:spcPts val="300"/>
+              </a:spcAft>
+              <a:buSzPct val="100000"/>
+              <a:buChar char="•"/>
+            </a:pPr>
+            <a:r>
+              <a:rPr lang="en-US" sz="1200" dirty="0">
+                <a:solidFill>
+                  <a:srgbClr val="1C2833"/>
+                </a:solidFill>
+                <a:latin typeface="Arial" pitchFamily="34" charset="0"/>
+                <a:ea typeface="Arial" pitchFamily="34" charset="-122"/>
+                <a:cs typeface="Arial" pitchFamily="34" charset="-120"/>
+              </a:rPr>
+              <a:t>"Your Day 3 change wasn't connected to a </a:t>
+            </a:r>
+            <a:pPr algn="l" indent="0" marL="0">
+              <a:lnSpc>
+                <a:spcPts val="1620"/>
+              </a:lnSpc>
+              <a:spcAft>
+                <a:spcPts val="300"/>
+              </a:spcAft>
+              <a:buNone/>
+            </a:pPr>
+            <a:r>
+              <a:rPr lang="en-US" sz="1200" i="1" dirty="0">
+                <a:solidFill>
+                  <a:srgbClr val="1C2833"/>
+                </a:solidFill>
+                <a:latin typeface="Arial" pitchFamily="34" charset="0"/>
+                <a:ea typeface="Arial" pitchFamily="34" charset="-122"/>
+                <a:cs typeface="Arial" pitchFamily="34" charset="-120"/>
+              </a:rPr>
+              <a:t>doṣa</a:t>
+            </a:r>
+            <a:pPr algn="l" indent="0" marL="0">
+              <a:lnSpc>
+                <a:spcPts val="1620"/>
+              </a:lnSpc>
+              <a:spcAft>
+                <a:spcPts val="300"/>
+              </a:spcAft>
+              <a:buNone/>
+            </a:pPr>
+            <a:r>
+              <a:rPr lang="en-US" sz="1200" dirty="0">
+                <a:solidFill>
+                  <a:srgbClr val="1C2833"/>
+                </a:solidFill>
+                <a:latin typeface="Arial" pitchFamily="34" charset="0"/>
+                <a:ea typeface="Arial" pitchFamily="34" charset="-122"/>
+                <a:cs typeface="Arial" pitchFamily="34" charset="-120"/>
+              </a:rPr>
+              <a:t> concept — what was the reason?"</a:t>
+            </a:r>
+            <a:endParaRPr lang="en-US" sz="1200" dirty="0"/>
+          </a:p>
+          <a:p>
+            <a:pPr algn="l" marL="342900" indent="-342900">
+              <a:lnSpc>
+                <a:spcPts val="1620"/>
+              </a:lnSpc>
+              <a:spcAft>
+                <a:spcPts val="300"/>
+              </a:spcAft>
+              <a:buSzPct val="100000"/>
+              <a:buChar char="•"/>
+            </a:pPr>
+            <a:r>
+              <a:rPr lang="en-US" sz="1200" dirty="0">
+                <a:solidFill>
+                  <a:srgbClr val="1C2833"/>
+                </a:solidFill>
+                <a:latin typeface="Arial" pitchFamily="34" charset="0"/>
+                <a:ea typeface="Arial" pitchFamily="34" charset="-122"/>
+                <a:cs typeface="Arial" pitchFamily="34" charset="-120"/>
+              </a:rPr>
+              <a:t>"You could end with a stronger line."</a:t>
+            </a:r>
+            <a:endParaRPr lang="en-US" sz="1200" dirty="0"/>
+          </a:p>
+        </p:txBody>
+      </p:sp>
+      <p:sp>
+        <p:nvSpPr>
+          <p:cNvPr id="5" name="Text 3"/>
+          <p:cNvSpPr/>
+          <p:nvPr/>
+        </p:nvSpPr>
+        <p:spPr>
+          <a:xfrm>
+            <a:off x="406301" y="4434929"/>
+            <a:ext cx="8498026" cy="213271"/>
+          </a:xfrm>
+          <a:prstGeom prst="rect">
+            <a:avLst/>
+          </a:prstGeom>
+          <a:noFill/>
+          <a:ln/>
+        </p:spPr>
+        <p:txBody>
+          <a:bodyPr wrap="square" lIns="0" tIns="0" rIns="0" bIns="0" rtlCol="0" anchor="t"/>
+          <a:lstStyle/>
+          <a:p>
             <a:pPr algn="l" indent="0" marL="0">
               <a:lnSpc>
                 <a:spcPts val="1680"/>
@@ -1915,8 +2830,257 @@
                 <a:ea typeface="Arial" pitchFamily="34" charset="-122"/>
                 <a:cs typeface="Arial" pitchFamily="34" charset="-120"/>
               </a:rPr>
-              <a:t>By the end of this lesson, every student has a </a:t>
-            </a:r>
+              <a:t>Middle ·  · IKS Curriculum</a:t>
+            </a:r>
+            <a:endParaRPr lang="en-US" sz="1200" dirty="0"/>
+          </a:p>
+        </p:txBody>
+      </p:sp>
+    </p:spTree>
+  </p:cSld>
+  <p:clrMapOvr>
+    <a:masterClrMapping/>
+  </p:clrMapOvr>
+</p:sld>
+</file>
+
+<file path=ppt/slides/slide11.xml><?xml version="1.0" encoding="utf-8"?>
+<p:sld xmlns:a="http://schemas.openxmlformats.org/drawingml/2006/main" xmlns:r="http://schemas.openxmlformats.org/officeDocument/2006/relationships" xmlns:p="http://schemas.openxmlformats.org/presentationml/2006/main">
+  <p:cSld name="Slide 11">
+    <p:bg>
+      <p:bgPr>
+        <a:solidFill>
+          <a:srgbClr val="FFFFFF"/>
+        </a:solidFill>
+      </p:bgPr>
+    </p:bg>
+    <p:spTree>
+      <p:nvGrpSpPr>
+        <p:cNvPr id="1" name=""/>
+        <p:cNvGrpSpPr/>
+        <p:nvPr/>
+      </p:nvGrpSpPr>
+      <p:grpSpPr>
+        <a:xfrm>
+          <a:off x="0" y="0"/>
+          <a:ext cx="0" cy="0"/>
+          <a:chOff x="0" y="0"/>
+          <a:chExt cx="0" cy="0"/>
+        </a:xfrm>
+      </p:grpSpPr>
+      <p:sp>
+        <p:nvSpPr>
+          <p:cNvPr id="2" name="Text 0"/>
+          <p:cNvSpPr/>
+          <p:nvPr/>
+        </p:nvSpPr>
+        <p:spPr>
+          <a:xfrm>
+            <a:off x="0" y="0"/>
+            <a:ext cx="9144000" cy="101501"/>
+          </a:xfrm>
+          <a:prstGeom prst="rect">
+            <a:avLst/>
+          </a:prstGeom>
+          <a:solidFill>
+            <a:srgbClr val="277884"/>
+          </a:solidFill>
+          <a:ln/>
+        </p:spPr>
+        <p:txBody>
+          <a:bodyPr wrap="square" rtlCol="0" anchor="ctr"/>
+          <a:lstStyle/>
+          <a:p>
+            <a:pPr indent="0" marL="0">
+              <a:buNone/>
+            </a:pPr>
+            <a:endParaRPr lang="en-US" dirty="0"/>
+          </a:p>
+        </p:txBody>
+      </p:sp>
+      <p:sp>
+        <p:nvSpPr>
+          <p:cNvPr id="3" name="Text 1"/>
+          <p:cNvSpPr/>
+          <p:nvPr/>
+        </p:nvSpPr>
+        <p:spPr>
+          <a:xfrm>
+            <a:off x="406301" y="457051"/>
+            <a:ext cx="8498026" cy="274290"/>
+          </a:xfrm>
+          <a:prstGeom prst="rect">
+            <a:avLst/>
+          </a:prstGeom>
+          <a:noFill/>
+          <a:ln/>
+        </p:spPr>
+        <p:txBody>
+          <a:bodyPr wrap="square" lIns="0" tIns="0" rIns="0" bIns="0" rtlCol="0" anchor="t"/>
+          <a:lstStyle/>
+          <a:p>
+            <a:pPr algn="l" indent="0" marL="0">
+              <a:lnSpc>
+                <a:spcPts val="2160"/>
+              </a:lnSpc>
+              <a:spcBef>
+                <a:spcPts val="600"/>
+              </a:spcBef>
+              <a:spcAft>
+                <a:spcPts val="800"/>
+              </a:spcAft>
+              <a:buNone/>
+            </a:pPr>
+            <a:r>
+              <a:rPr lang="en-US" sz="1800" b="1" dirty="0">
+                <a:solidFill>
+                  <a:srgbClr val="FE4447"/>
+                </a:solidFill>
+                <a:latin typeface="Georgia" pitchFamily="34" charset="0"/>
+                <a:ea typeface="Georgia" pitchFamily="34" charset="-122"/>
+                <a:cs typeface="Georgia" pitchFamily="34" charset="-120"/>
+              </a:rPr>
+              <a:t>Wrap-up (5 min)</a:t>
+            </a:r>
+            <a:endParaRPr lang="en-US" sz="1800" dirty="0"/>
+          </a:p>
+        </p:txBody>
+      </p:sp>
+      <p:sp>
+        <p:nvSpPr>
+          <p:cNvPr id="4" name="Text 2"/>
+          <p:cNvSpPr/>
+          <p:nvPr/>
+        </p:nvSpPr>
+        <p:spPr>
+          <a:xfrm>
+            <a:off x="634901" y="883593"/>
+            <a:ext cx="8102798" cy="769441"/>
+          </a:xfrm>
+          <a:prstGeom prst="rect">
+            <a:avLst/>
+          </a:prstGeom>
+          <a:noFill/>
+          <a:ln/>
+        </p:spPr>
+        <p:txBody>
+          <a:bodyPr wrap="square" lIns="0" tIns="0" rIns="0" bIns="0" rtlCol="0" anchor="t"/>
+          <a:lstStyle/>
+          <a:p>
+            <a:pPr algn="l" marL="342900" indent="-342900">
+              <a:lnSpc>
+                <a:spcPts val="1620"/>
+              </a:lnSpc>
+              <a:spcAft>
+                <a:spcPts val="300"/>
+              </a:spcAft>
+              <a:buSzPct val="100000"/>
+              <a:buChar char="•"/>
+            </a:pPr>
+            <a:r>
+              <a:rPr lang="en-US" sz="1200" dirty="0">
+                <a:solidFill>
+                  <a:srgbClr val="1C2833"/>
+                </a:solidFill>
+                <a:latin typeface="Arial" pitchFamily="34" charset="0"/>
+                <a:ea typeface="Arial" pitchFamily="34" charset="-122"/>
+                <a:cs typeface="Arial" pitchFamily="34" charset="-120"/>
+              </a:rPr>
+              <a:t>Every student raises their artefact and shows the class for 5 seconds (no presenting, just visual).</a:t>
+            </a:r>
+            <a:endParaRPr lang="en-US" sz="1200" dirty="0"/>
+          </a:p>
+          <a:p>
+            <a:pPr algn="l" marL="342900" indent="-342900">
+              <a:lnSpc>
+                <a:spcPts val="1620"/>
+              </a:lnSpc>
+              <a:spcAft>
+                <a:spcPts val="300"/>
+              </a:spcAft>
+              <a:buSzPct val="100000"/>
+              <a:buChar char="•"/>
+            </a:pPr>
+            <a:r>
+              <a:rPr lang="en-US" sz="1200" dirty="0">
+                <a:solidFill>
+                  <a:srgbClr val="1C2833"/>
+                </a:solidFill>
+                <a:latin typeface="Arial" pitchFamily="34" charset="0"/>
+                <a:ea typeface="Arial" pitchFamily="34" charset="-122"/>
+                <a:cs typeface="Arial" pitchFamily="34" charset="-120"/>
+              </a:rPr>
+              <a:t>Submit Day-8 plan + photograph of Day-9 artefact.</a:t>
+            </a:r>
+            <a:endParaRPr lang="en-US" sz="1200" dirty="0"/>
+          </a:p>
+          <a:p>
+            <a:pPr algn="l" marL="342900" indent="-342900">
+              <a:lnSpc>
+                <a:spcPts val="1620"/>
+              </a:lnSpc>
+              <a:spcAft>
+                <a:spcPts val="300"/>
+              </a:spcAft>
+              <a:buSzPct val="100000"/>
+              <a:buChar char="•"/>
+            </a:pPr>
+            <a:r>
+              <a:rPr lang="en-US" sz="1200" dirty="0">
+                <a:solidFill>
+                  <a:srgbClr val="1C2833"/>
+                </a:solidFill>
+                <a:latin typeface="Arial" pitchFamily="34" charset="0"/>
+                <a:ea typeface="Arial" pitchFamily="34" charset="-122"/>
+                <a:cs typeface="Arial" pitchFamily="34" charset="-120"/>
+              </a:rPr>
+              <a:t>Preview Day 10: </a:t>
+            </a:r>
+            <a:pPr algn="l" indent="0" marL="0">
+              <a:lnSpc>
+                <a:spcPts val="1620"/>
+              </a:lnSpc>
+              <a:spcAft>
+                <a:spcPts val="300"/>
+              </a:spcAft>
+              <a:buNone/>
+            </a:pPr>
+            <a:r>
+              <a:rPr lang="en-US" sz="1200" i="1" dirty="0">
+                <a:solidFill>
+                  <a:srgbClr val="1C2833"/>
+                </a:solidFill>
+                <a:latin typeface="Arial" pitchFamily="34" charset="0"/>
+                <a:ea typeface="Arial" pitchFamily="34" charset="-122"/>
+                <a:cs typeface="Arial" pitchFamily="34" charset="-120"/>
+              </a:rPr>
+              <a:t>"Tomorrow — summative quiz first, then 3-minute presentations. Bring everything."</a:t>
+            </a:r>
+            <a:endParaRPr lang="en-US" sz="1200" dirty="0"/>
+          </a:p>
+        </p:txBody>
+      </p:sp>
+      <p:sp>
+        <p:nvSpPr>
+          <p:cNvPr id="5" name="Text 3"/>
+          <p:cNvSpPr/>
+          <p:nvPr/>
+        </p:nvSpPr>
+        <p:spPr>
+          <a:xfrm>
+            <a:off x="406301" y="4434929"/>
+            <a:ext cx="8498026" cy="213271"/>
+          </a:xfrm>
+          <a:prstGeom prst="rect">
+            <a:avLst/>
+          </a:prstGeom>
+          <a:noFill/>
+          <a:ln/>
+        </p:spPr>
+        <p:txBody>
+          <a:bodyPr wrap="square" lIns="0" tIns="0" rIns="0" bIns="0" rtlCol="0" anchor="t"/>
+          <a:lstStyle/>
+          <a:p>
             <a:pPr algn="l" indent="0" marL="0">
               <a:lnSpc>
                 <a:spcPts val="1680"/>
@@ -1930,6 +3094,945 @@
               <a:buNone/>
             </a:pPr>
             <a:r>
+              <a:rPr lang="en-US" sz="1200" dirty="0">
+                <a:solidFill>
+                  <a:srgbClr val="1C2833"/>
+                </a:solidFill>
+                <a:latin typeface="Arial" pitchFamily="34" charset="0"/>
+                <a:ea typeface="Arial" pitchFamily="34" charset="-122"/>
+                <a:cs typeface="Arial" pitchFamily="34" charset="-120"/>
+              </a:rPr>
+              <a:t>Middle ·  · IKS Curriculum</a:t>
+            </a:r>
+            <a:endParaRPr lang="en-US" sz="1200" dirty="0"/>
+          </a:p>
+        </p:txBody>
+      </p:sp>
+    </p:spTree>
+  </p:cSld>
+  <p:clrMapOvr>
+    <a:masterClrMapping/>
+  </p:clrMapOvr>
+</p:sld>
+</file>
+
+<file path=ppt/slides/slide12.xml><?xml version="1.0" encoding="utf-8"?>
+<p:sld xmlns:a="http://schemas.openxmlformats.org/drawingml/2006/main" xmlns:r="http://schemas.openxmlformats.org/officeDocument/2006/relationships" xmlns:p="http://schemas.openxmlformats.org/presentationml/2006/main">
+  <p:cSld name="Slide 12">
+    <p:bg>
+      <p:bgPr>
+        <a:solidFill>
+          <a:srgbClr val="FFFFFF"/>
+        </a:solidFill>
+      </p:bgPr>
+    </p:bg>
+    <p:spTree>
+      <p:nvGrpSpPr>
+        <p:cNvPr id="1" name=""/>
+        <p:cNvGrpSpPr/>
+        <p:nvPr/>
+      </p:nvGrpSpPr>
+      <p:grpSpPr>
+        <a:xfrm>
+          <a:off x="0" y="0"/>
+          <a:ext cx="0" cy="0"/>
+          <a:chOff x="0" y="0"/>
+          <a:chExt cx="0" cy="0"/>
+        </a:xfrm>
+      </p:grpSpPr>
+      <p:sp>
+        <p:nvSpPr>
+          <p:cNvPr id="2" name="Text 0"/>
+          <p:cNvSpPr/>
+          <p:nvPr/>
+        </p:nvSpPr>
+        <p:spPr>
+          <a:xfrm>
+            <a:off x="0" y="0"/>
+            <a:ext cx="9144000" cy="101501"/>
+          </a:xfrm>
+          <a:prstGeom prst="rect">
+            <a:avLst/>
+          </a:prstGeom>
+          <a:solidFill>
+            <a:srgbClr val="277884"/>
+          </a:solidFill>
+          <a:ln/>
+        </p:spPr>
+        <p:txBody>
+          <a:bodyPr wrap="square" rtlCol="0" anchor="ctr"/>
+          <a:lstStyle/>
+          <a:p>
+            <a:pPr indent="0" marL="0">
+              <a:buNone/>
+            </a:pPr>
+            <a:endParaRPr lang="en-US" dirty="0"/>
+          </a:p>
+        </p:txBody>
+      </p:sp>
+      <p:sp>
+        <p:nvSpPr>
+          <p:cNvPr id="3" name="Text 1"/>
+          <p:cNvSpPr/>
+          <p:nvPr/>
+        </p:nvSpPr>
+        <p:spPr>
+          <a:xfrm>
+            <a:off x="406301" y="457051"/>
+            <a:ext cx="8498026" cy="274290"/>
+          </a:xfrm>
+          <a:prstGeom prst="rect">
+            <a:avLst/>
+          </a:prstGeom>
+          <a:noFill/>
+          <a:ln/>
+        </p:spPr>
+        <p:txBody>
+          <a:bodyPr wrap="square" lIns="0" tIns="0" rIns="0" bIns="0" rtlCol="0" anchor="t"/>
+          <a:lstStyle/>
+          <a:p>
+            <a:pPr algn="l" indent="0" marL="0">
+              <a:lnSpc>
+                <a:spcPts val="2160"/>
+              </a:lnSpc>
+              <a:spcBef>
+                <a:spcPts val="600"/>
+              </a:spcBef>
+              <a:spcAft>
+                <a:spcPts val="800"/>
+              </a:spcAft>
+              <a:buNone/>
+            </a:pPr>
+            <a:r>
+              <a:rPr lang="en-US" sz="1800" b="1" dirty="0">
+                <a:solidFill>
+                  <a:srgbClr val="FE4447"/>
+                </a:solidFill>
+                <a:latin typeface="Georgia" pitchFamily="34" charset="0"/>
+                <a:ea typeface="Georgia" pitchFamily="34" charset="-122"/>
+                <a:cs typeface="Georgia" pitchFamily="34" charset="-120"/>
+              </a:rPr>
+              <a:t>Student-facing content</a:t>
+            </a:r>
+            <a:endParaRPr lang="en-US" sz="1800" dirty="0"/>
+          </a:p>
+        </p:txBody>
+      </p:sp>
+      <p:sp>
+        <p:nvSpPr>
+          <p:cNvPr id="4" name="Text 2"/>
+          <p:cNvSpPr/>
+          <p:nvPr/>
+        </p:nvSpPr>
+        <p:spPr>
+          <a:xfrm>
+            <a:off x="406301" y="883593"/>
+            <a:ext cx="8331398" cy="1957388"/>
+          </a:xfrm>
+          <a:prstGeom prst="rect">
+            <a:avLst/>
+          </a:prstGeom>
+          <a:solidFill>
+            <a:srgbClr val="F4F8F9"/>
+          </a:solidFill>
+          <a:ln/>
+        </p:spPr>
+        <p:txBody>
+          <a:bodyPr wrap="square" rtlCol="0" anchor="ctr"/>
+          <a:lstStyle/>
+          <a:p>
+            <a:pPr indent="0" marL="0">
+              <a:buNone/>
+            </a:pPr>
+            <a:endParaRPr lang="en-US" dirty="0"/>
+          </a:p>
+        </p:txBody>
+      </p:sp>
+      <p:sp>
+        <p:nvSpPr>
+          <p:cNvPr id="5" name="Shape 3"/>
+          <p:cNvSpPr/>
+          <p:nvPr/>
+        </p:nvSpPr>
+        <p:spPr>
+          <a:xfrm>
+            <a:off x="434876" y="883593"/>
+            <a:ext cx="0" cy="1957388"/>
+          </a:xfrm>
+          <a:prstGeom prst="line">
+            <a:avLst/>
+          </a:prstGeom>
+          <a:noFill/>
+          <a:ln w="57150">
+            <a:solidFill>
+              <a:srgbClr val="FE4447"/>
+            </a:solidFill>
+            <a:prstDash val="solid"/>
+          </a:ln>
+        </p:spPr>
+      </p:sp>
+      <p:sp>
+        <p:nvSpPr>
+          <p:cNvPr id="6" name="Text 4"/>
+          <p:cNvSpPr/>
+          <p:nvPr/>
+        </p:nvSpPr>
+        <p:spPr>
+          <a:xfrm>
+            <a:off x="692051" y="1074093"/>
+            <a:ext cx="7973389" cy="230981"/>
+          </a:xfrm>
+          <a:prstGeom prst="rect">
+            <a:avLst/>
+          </a:prstGeom>
+          <a:noFill/>
+          <a:ln/>
+        </p:spPr>
+        <p:txBody>
+          <a:bodyPr wrap="square" lIns="0" tIns="0" rIns="0" bIns="0" rtlCol="0" anchor="t"/>
+          <a:lstStyle/>
+          <a:p>
+            <a:pPr algn="l" indent="0" marL="0">
+              <a:lnSpc>
+                <a:spcPts val="1820"/>
+              </a:lnSpc>
+              <a:spcBef>
+                <a:spcPts val="300"/>
+              </a:spcBef>
+              <a:spcAft>
+                <a:spcPts val="300"/>
+              </a:spcAft>
+              <a:buNone/>
+            </a:pPr>
+            <a:r>
+              <a:rPr lang="en-US" sz="1300" b="1" i="1" dirty="0">
+                <a:solidFill>
+                  <a:srgbClr val="1C2833"/>
+                </a:solidFill>
+                <a:latin typeface="Georgia" pitchFamily="34" charset="0"/>
+                <a:ea typeface="Georgia" pitchFamily="34" charset="-122"/>
+                <a:cs typeface="Georgia" pitchFamily="34" charset="-120"/>
+              </a:rPr>
+              <a:t>What "done" looks like by end of Day 9:</a:t>
+            </a:r>
+            <a:endParaRPr lang="en-US" sz="1300" dirty="0"/>
+          </a:p>
+        </p:txBody>
+      </p:sp>
+      <p:sp>
+        <p:nvSpPr>
+          <p:cNvPr id="7" name="Text 5"/>
+          <p:cNvSpPr/>
+          <p:nvPr/>
+        </p:nvSpPr>
+        <p:spPr>
+          <a:xfrm>
+            <a:off x="692051" y="1343174"/>
+            <a:ext cx="7973389" cy="230981"/>
+          </a:xfrm>
+          <a:prstGeom prst="rect">
+            <a:avLst/>
+          </a:prstGeom>
+          <a:noFill/>
+          <a:ln/>
+        </p:spPr>
+        <p:txBody>
+          <a:bodyPr wrap="square" lIns="0" tIns="0" rIns="0" bIns="0" rtlCol="0" anchor="t"/>
+          <a:lstStyle/>
+          <a:p>
+            <a:pPr algn="l" indent="0" marL="0">
+              <a:lnSpc>
+                <a:spcPts val="1820"/>
+              </a:lnSpc>
+              <a:spcBef>
+                <a:spcPts val="300"/>
+              </a:spcBef>
+              <a:spcAft>
+                <a:spcPts val="300"/>
+              </a:spcAft>
+              <a:buNone/>
+            </a:pPr>
+            <a:r>
+              <a:rPr lang="en-US" sz="1300" i="1" dirty="0">
+                <a:solidFill>
+                  <a:srgbClr val="1C2833"/>
+                </a:solidFill>
+                <a:latin typeface="Georgia" pitchFamily="34" charset="0"/>
+                <a:ea typeface="Georgia" pitchFamily="34" charset="-122"/>
+                <a:cs typeface="Georgia" pitchFamily="34" charset="-120"/>
+              </a:rPr>
+              <a:t>Artefact is complete (or final draft if video).</a:t>
+            </a:r>
+            <a:endParaRPr lang="en-US" sz="1300" dirty="0"/>
+          </a:p>
+        </p:txBody>
+      </p:sp>
+      <p:sp>
+        <p:nvSpPr>
+          <p:cNvPr id="8" name="Text 6"/>
+          <p:cNvSpPr/>
+          <p:nvPr/>
+        </p:nvSpPr>
+        <p:spPr>
+          <a:xfrm>
+            <a:off x="692051" y="1612255"/>
+            <a:ext cx="7973389" cy="230981"/>
+          </a:xfrm>
+          <a:prstGeom prst="rect">
+            <a:avLst/>
+          </a:prstGeom>
+          <a:noFill/>
+          <a:ln/>
+        </p:spPr>
+        <p:txBody>
+          <a:bodyPr wrap="square" lIns="0" tIns="0" rIns="0" bIns="0" rtlCol="0" anchor="t"/>
+          <a:lstStyle/>
+          <a:p>
+            <a:pPr algn="l" indent="0" marL="0">
+              <a:lnSpc>
+                <a:spcPts val="1820"/>
+              </a:lnSpc>
+              <a:spcBef>
+                <a:spcPts val="300"/>
+              </a:spcBef>
+              <a:spcAft>
+                <a:spcPts val="300"/>
+              </a:spcAft>
+              <a:buNone/>
+            </a:pPr>
+            <a:r>
+              <a:rPr lang="en-US" sz="1300" i="1" dirty="0">
+                <a:solidFill>
+                  <a:srgbClr val="1C2833"/>
+                </a:solidFill>
+                <a:latin typeface="Georgia" pitchFamily="34" charset="0"/>
+                <a:ea typeface="Georgia" pitchFamily="34" charset="-122"/>
+                <a:cs typeface="Georgia" pitchFamily="34" charset="-120"/>
+              </a:rPr>
+              <a:t>Citation is visible on the artefact.</a:t>
+            </a:r>
+            <a:endParaRPr lang="en-US" sz="1300" dirty="0"/>
+          </a:p>
+        </p:txBody>
+      </p:sp>
+      <p:sp>
+        <p:nvSpPr>
+          <p:cNvPr id="9" name="Text 7"/>
+          <p:cNvSpPr/>
+          <p:nvPr/>
+        </p:nvSpPr>
+        <p:spPr>
+          <a:xfrm>
+            <a:off x="692051" y="1881336"/>
+            <a:ext cx="7973389" cy="230981"/>
+          </a:xfrm>
+          <a:prstGeom prst="rect">
+            <a:avLst/>
+          </a:prstGeom>
+          <a:noFill/>
+          <a:ln/>
+        </p:spPr>
+        <p:txBody>
+          <a:bodyPr wrap="square" lIns="0" tIns="0" rIns="0" bIns="0" rtlCol="0" anchor="t"/>
+          <a:lstStyle/>
+          <a:p>
+            <a:pPr algn="l" indent="0" marL="0">
+              <a:lnSpc>
+                <a:spcPts val="1820"/>
+              </a:lnSpc>
+              <a:spcBef>
+                <a:spcPts val="300"/>
+              </a:spcBef>
+              <a:spcAft>
+                <a:spcPts val="300"/>
+              </a:spcAft>
+              <a:buNone/>
+            </a:pPr>
+            <a:r>
+              <a:rPr lang="en-US" sz="1300" i="1" dirty="0">
+                <a:solidFill>
+                  <a:srgbClr val="1C2833"/>
+                </a:solidFill>
+                <a:latin typeface="Georgia" pitchFamily="34" charset="0"/>
+                <a:ea typeface="Georgia" pitchFamily="34" charset="-122"/>
+                <a:cs typeface="Georgia" pitchFamily="34" charset="-120"/>
+              </a:rPr>
+              <a:t>All five days have a change AND a concept.</a:t>
+            </a:r>
+            <a:endParaRPr lang="en-US" sz="1300" dirty="0"/>
+          </a:p>
+        </p:txBody>
+      </p:sp>
+      <p:sp>
+        <p:nvSpPr>
+          <p:cNvPr id="10" name="Text 8"/>
+          <p:cNvSpPr/>
+          <p:nvPr/>
+        </p:nvSpPr>
+        <p:spPr>
+          <a:xfrm>
+            <a:off x="692051" y="2150418"/>
+            <a:ext cx="7973389" cy="230981"/>
+          </a:xfrm>
+          <a:prstGeom prst="rect">
+            <a:avLst/>
+          </a:prstGeom>
+          <a:noFill/>
+          <a:ln/>
+        </p:spPr>
+        <p:txBody>
+          <a:bodyPr wrap="square" lIns="0" tIns="0" rIns="0" bIns="0" rtlCol="0" anchor="t"/>
+          <a:lstStyle/>
+          <a:p>
+            <a:pPr algn="l" indent="0" marL="0">
+              <a:lnSpc>
+                <a:spcPts val="1820"/>
+              </a:lnSpc>
+              <a:spcBef>
+                <a:spcPts val="300"/>
+              </a:spcBef>
+              <a:spcAft>
+                <a:spcPts val="300"/>
+              </a:spcAft>
+              <a:buNone/>
+            </a:pPr>
+            <a:r>
+              <a:rPr lang="en-US" sz="1300" i="1" dirty="0">
+                <a:solidFill>
+                  <a:srgbClr val="1C2833"/>
+                </a:solidFill>
+                <a:latin typeface="Georgia" pitchFamily="34" charset="0"/>
+                <a:ea typeface="Georgia" pitchFamily="34" charset="-122"/>
+                <a:cs typeface="Georgia" pitchFamily="34" charset="-120"/>
+              </a:rPr>
+              <a:t>You've rehearsed once with a timer.</a:t>
+            </a:r>
+            <a:endParaRPr lang="en-US" sz="1300" dirty="0"/>
+          </a:p>
+        </p:txBody>
+      </p:sp>
+      <p:sp>
+        <p:nvSpPr>
+          <p:cNvPr id="11" name="Text 9"/>
+          <p:cNvSpPr/>
+          <p:nvPr/>
+        </p:nvSpPr>
+        <p:spPr>
+          <a:xfrm>
+            <a:off x="692051" y="2419499"/>
+            <a:ext cx="7973389" cy="230981"/>
+          </a:xfrm>
+          <a:prstGeom prst="rect">
+            <a:avLst/>
+          </a:prstGeom>
+          <a:noFill/>
+          <a:ln/>
+        </p:spPr>
+        <p:txBody>
+          <a:bodyPr wrap="square" lIns="0" tIns="0" rIns="0" bIns="0" rtlCol="0" anchor="t"/>
+          <a:lstStyle/>
+          <a:p>
+            <a:pPr algn="l" indent="0" marL="0">
+              <a:lnSpc>
+                <a:spcPts val="1820"/>
+              </a:lnSpc>
+              <a:spcBef>
+                <a:spcPts val="300"/>
+              </a:spcBef>
+              <a:spcAft>
+                <a:spcPts val="300"/>
+              </a:spcAft>
+              <a:buNone/>
+            </a:pPr>
+            <a:r>
+              <a:rPr lang="en-US" sz="1300" i="1" dirty="0">
+                <a:solidFill>
+                  <a:srgbClr val="1C2833"/>
+                </a:solidFill>
+                <a:latin typeface="Georgia" pitchFamily="34" charset="0"/>
+                <a:ea typeface="Georgia" pitchFamily="34" charset="-122"/>
+                <a:cs typeface="Georgia" pitchFamily="34" charset="-120"/>
+              </a:rPr>
+              <a:t>You know your first sentence by heart.</a:t>
+            </a:r>
+            <a:endParaRPr lang="en-US" sz="1300" dirty="0"/>
+          </a:p>
+        </p:txBody>
+      </p:sp>
+      <p:sp>
+        <p:nvSpPr>
+          <p:cNvPr id="12" name="Text 10"/>
+          <p:cNvSpPr/>
+          <p:nvPr/>
+        </p:nvSpPr>
+        <p:spPr>
+          <a:xfrm>
+            <a:off x="406301" y="4434929"/>
+            <a:ext cx="8498026" cy="213271"/>
+          </a:xfrm>
+          <a:prstGeom prst="rect">
+            <a:avLst/>
+          </a:prstGeom>
+          <a:noFill/>
+          <a:ln/>
+        </p:spPr>
+        <p:txBody>
+          <a:bodyPr wrap="square" lIns="0" tIns="0" rIns="0" bIns="0" rtlCol="0" anchor="t"/>
+          <a:lstStyle/>
+          <a:p>
+            <a:pPr algn="l" indent="0" marL="0">
+              <a:lnSpc>
+                <a:spcPts val="1680"/>
+              </a:lnSpc>
+              <a:spcBef>
+                <a:spcPts val="300"/>
+              </a:spcBef>
+              <a:spcAft>
+                <a:spcPts val="300"/>
+              </a:spcAft>
+              <a:buNone/>
+            </a:pPr>
+            <a:r>
+              <a:rPr lang="en-US" sz="1200" dirty="0">
+                <a:solidFill>
+                  <a:srgbClr val="1C2833"/>
+                </a:solidFill>
+                <a:latin typeface="Arial" pitchFamily="34" charset="0"/>
+                <a:ea typeface="Arial" pitchFamily="34" charset="-122"/>
+                <a:cs typeface="Arial" pitchFamily="34" charset="-120"/>
+              </a:rPr>
+              <a:t>Middle ·  · IKS Curriculum</a:t>
+            </a:r>
+            <a:endParaRPr lang="en-US" sz="1200" dirty="0"/>
+          </a:p>
+        </p:txBody>
+      </p:sp>
+    </p:spTree>
+  </p:cSld>
+  <p:clrMapOvr>
+    <a:masterClrMapping/>
+  </p:clrMapOvr>
+</p:sld>
+</file>
+
+<file path=ppt/slides/slide13.xml><?xml version="1.0" encoding="utf-8"?>
+<p:sld xmlns:a="http://schemas.openxmlformats.org/drawingml/2006/main" xmlns:r="http://schemas.openxmlformats.org/officeDocument/2006/relationships" xmlns:p="http://schemas.openxmlformats.org/presentationml/2006/main">
+  <p:cSld name="Slide 13">
+    <p:bg>
+      <p:bgPr>
+        <a:solidFill>
+          <a:srgbClr val="FFFFFF"/>
+        </a:solidFill>
+      </p:bgPr>
+    </p:bg>
+    <p:spTree>
+      <p:nvGrpSpPr>
+        <p:cNvPr id="1" name=""/>
+        <p:cNvGrpSpPr/>
+        <p:nvPr/>
+      </p:nvGrpSpPr>
+      <p:grpSpPr>
+        <a:xfrm>
+          <a:off x="0" y="0"/>
+          <a:ext cx="0" cy="0"/>
+          <a:chOff x="0" y="0"/>
+          <a:chExt cx="0" cy="0"/>
+        </a:xfrm>
+      </p:grpSpPr>
+      <p:sp>
+        <p:nvSpPr>
+          <p:cNvPr id="2" name="Text 0"/>
+          <p:cNvSpPr/>
+          <p:nvPr/>
+        </p:nvSpPr>
+        <p:spPr>
+          <a:xfrm>
+            <a:off x="0" y="0"/>
+            <a:ext cx="9144000" cy="101501"/>
+          </a:xfrm>
+          <a:prstGeom prst="rect">
+            <a:avLst/>
+          </a:prstGeom>
+          <a:solidFill>
+            <a:srgbClr val="277884"/>
+          </a:solidFill>
+          <a:ln/>
+        </p:spPr>
+        <p:txBody>
+          <a:bodyPr wrap="square" rtlCol="0" anchor="ctr"/>
+          <a:lstStyle/>
+          <a:p>
+            <a:pPr indent="0" marL="0">
+              <a:buNone/>
+            </a:pPr>
+            <a:endParaRPr lang="en-US" dirty="0"/>
+          </a:p>
+        </p:txBody>
+      </p:sp>
+      <p:sp>
+        <p:nvSpPr>
+          <p:cNvPr id="3" name="Text 1"/>
+          <p:cNvSpPr/>
+          <p:nvPr/>
+        </p:nvSpPr>
+        <p:spPr>
+          <a:xfrm>
+            <a:off x="406301" y="457051"/>
+            <a:ext cx="8498026" cy="274290"/>
+          </a:xfrm>
+          <a:prstGeom prst="rect">
+            <a:avLst/>
+          </a:prstGeom>
+          <a:noFill/>
+          <a:ln/>
+        </p:spPr>
+        <p:txBody>
+          <a:bodyPr wrap="square" lIns="0" tIns="0" rIns="0" bIns="0" rtlCol="0" anchor="t"/>
+          <a:lstStyle/>
+          <a:p>
+            <a:pPr algn="l" indent="0" marL="0">
+              <a:lnSpc>
+                <a:spcPts val="2160"/>
+              </a:lnSpc>
+              <a:spcBef>
+                <a:spcPts val="600"/>
+              </a:spcBef>
+              <a:spcAft>
+                <a:spcPts val="800"/>
+              </a:spcAft>
+              <a:buNone/>
+            </a:pPr>
+            <a:r>
+              <a:rPr lang="en-US" sz="1800" b="1" dirty="0">
+                <a:solidFill>
+                  <a:srgbClr val="FE4447"/>
+                </a:solidFill>
+                <a:latin typeface="Georgia" pitchFamily="34" charset="0"/>
+                <a:ea typeface="Georgia" pitchFamily="34" charset="-122"/>
+                <a:cs typeface="Georgia" pitchFamily="34" charset="-120"/>
+              </a:rPr>
+              <a:t>Homework</a:t>
+            </a:r>
+            <a:endParaRPr lang="en-US" sz="1800" dirty="0"/>
+          </a:p>
+        </p:txBody>
+      </p:sp>
+      <p:sp>
+        <p:nvSpPr>
+          <p:cNvPr id="4" name="Text 2"/>
+          <p:cNvSpPr/>
+          <p:nvPr/>
+        </p:nvSpPr>
+        <p:spPr>
+          <a:xfrm>
+            <a:off x="634901" y="883593"/>
+            <a:ext cx="8102798" cy="281880"/>
+          </a:xfrm>
+          <a:prstGeom prst="rect">
+            <a:avLst/>
+          </a:prstGeom>
+          <a:noFill/>
+          <a:ln/>
+        </p:spPr>
+        <p:txBody>
+          <a:bodyPr wrap="square" lIns="0" tIns="0" rIns="0" bIns="0" rtlCol="0" anchor="t"/>
+          <a:lstStyle/>
+          <a:p>
+            <a:pPr algn="l" marL="342900" indent="-342900">
+              <a:lnSpc>
+                <a:spcPts val="1620"/>
+              </a:lnSpc>
+              <a:spcAft>
+                <a:spcPts val="300"/>
+              </a:spcAft>
+              <a:buSzPct val="100000"/>
+              <a:buChar char="•"/>
+            </a:pPr>
+            <a:r>
+              <a:rPr lang="en-US" sz="1200" dirty="0">
+                <a:solidFill>
+                  <a:srgbClr val="1C2833"/>
+                </a:solidFill>
+                <a:latin typeface="Arial" pitchFamily="34" charset="0"/>
+                <a:ea typeface="Arial" pitchFamily="34" charset="-122"/>
+                <a:cs typeface="Arial" pitchFamily="34" charset="-120"/>
+              </a:rPr>
+              <a:t>Memorise the </a:t>
+            </a:r>
+            <a:pPr algn="l" indent="0" marL="0">
+              <a:lnSpc>
+                <a:spcPts val="1620"/>
+              </a:lnSpc>
+              <a:spcAft>
+                <a:spcPts val="300"/>
+              </a:spcAft>
+              <a:buNone/>
+            </a:pPr>
+            <a:r>
+              <a:rPr lang="en-US" sz="1200" b="1" dirty="0">
+                <a:solidFill>
+                  <a:srgbClr val="1C2833"/>
+                </a:solidFill>
+                <a:latin typeface="Arial" pitchFamily="34" charset="0"/>
+                <a:ea typeface="Arial" pitchFamily="34" charset="-122"/>
+                <a:cs typeface="Arial" pitchFamily="34" charset="-120"/>
+              </a:rPr>
+              <a:t>first sentence</a:t>
+            </a:r>
+            <a:pPr algn="l" indent="0" marL="0">
+              <a:lnSpc>
+                <a:spcPts val="1620"/>
+              </a:lnSpc>
+              <a:spcAft>
+                <a:spcPts val="300"/>
+              </a:spcAft>
+              <a:buNone/>
+            </a:pPr>
+            <a:r>
+              <a:rPr lang="en-US" sz="1200" dirty="0">
+                <a:solidFill>
+                  <a:srgbClr val="1C2833"/>
+                </a:solidFill>
+                <a:latin typeface="Arial" pitchFamily="34" charset="0"/>
+                <a:ea typeface="Arial" pitchFamily="34" charset="-122"/>
+                <a:cs typeface="Arial" pitchFamily="34" charset="-120"/>
+              </a:rPr>
+              <a:t> of your presentation. Final tweaks. If video — finish recording. Bring everything tomorrow.</a:t>
+            </a:r>
+            <a:endParaRPr lang="en-US" sz="1200" dirty="0"/>
+          </a:p>
+        </p:txBody>
+      </p:sp>
+      <p:sp>
+        <p:nvSpPr>
+          <p:cNvPr id="5" name="Text 3"/>
+          <p:cNvSpPr/>
+          <p:nvPr/>
+        </p:nvSpPr>
+        <p:spPr>
+          <a:xfrm>
+            <a:off x="406301" y="4434929"/>
+            <a:ext cx="8498026" cy="213271"/>
+          </a:xfrm>
+          <a:prstGeom prst="rect">
+            <a:avLst/>
+          </a:prstGeom>
+          <a:noFill/>
+          <a:ln/>
+        </p:spPr>
+        <p:txBody>
+          <a:bodyPr wrap="square" lIns="0" tIns="0" rIns="0" bIns="0" rtlCol="0" anchor="t"/>
+          <a:lstStyle/>
+          <a:p>
+            <a:pPr algn="l" indent="0" marL="0">
+              <a:lnSpc>
+                <a:spcPts val="1680"/>
+              </a:lnSpc>
+              <a:spcBef>
+                <a:spcPts val="300"/>
+              </a:spcBef>
+              <a:spcAft>
+                <a:spcPts val="300"/>
+              </a:spcAft>
+              <a:buNone/>
+            </a:pPr>
+            <a:r>
+              <a:rPr lang="en-US" sz="1200" dirty="0">
+                <a:solidFill>
+                  <a:srgbClr val="1C2833"/>
+                </a:solidFill>
+                <a:latin typeface="Arial" pitchFamily="34" charset="0"/>
+                <a:ea typeface="Arial" pitchFamily="34" charset="-122"/>
+                <a:cs typeface="Arial" pitchFamily="34" charset="-120"/>
+              </a:rPr>
+              <a:t>Middle ·  · IKS Curriculum</a:t>
+            </a:r>
+            <a:endParaRPr lang="en-US" sz="1200" dirty="0"/>
+          </a:p>
+        </p:txBody>
+      </p:sp>
+    </p:spTree>
+  </p:cSld>
+  <p:clrMapOvr>
+    <a:masterClrMapping/>
+  </p:clrMapOvr>
+</p:sld>
+</file>
+
+<file path=ppt/slides/slide14.xml><?xml version="1.0" encoding="utf-8"?>
+<p:sld xmlns:a="http://schemas.openxmlformats.org/drawingml/2006/main" xmlns:r="http://schemas.openxmlformats.org/officeDocument/2006/relationships" xmlns:p="http://schemas.openxmlformats.org/presentationml/2006/main">
+  <p:cSld name="Slide 14">
+    <p:bg>
+      <p:bgPr>
+        <a:solidFill>
+          <a:srgbClr val="FFFFFF"/>
+        </a:solidFill>
+      </p:bgPr>
+    </p:bg>
+    <p:spTree>
+      <p:nvGrpSpPr>
+        <p:cNvPr id="1" name=""/>
+        <p:cNvGrpSpPr/>
+        <p:nvPr/>
+      </p:nvGrpSpPr>
+      <p:grpSpPr>
+        <a:xfrm>
+          <a:off x="0" y="0"/>
+          <a:ext cx="0" cy="0"/>
+          <a:chOff x="0" y="0"/>
+          <a:chExt cx="0" cy="0"/>
+        </a:xfrm>
+      </p:grpSpPr>
+      <p:sp>
+        <p:nvSpPr>
+          <p:cNvPr id="2" name="Text 0"/>
+          <p:cNvSpPr/>
+          <p:nvPr/>
+        </p:nvSpPr>
+        <p:spPr>
+          <a:xfrm>
+            <a:off x="0" y="0"/>
+            <a:ext cx="9144000" cy="101501"/>
+          </a:xfrm>
+          <a:prstGeom prst="rect">
+            <a:avLst/>
+          </a:prstGeom>
+          <a:solidFill>
+            <a:srgbClr val="277884"/>
+          </a:solidFill>
+          <a:ln/>
+        </p:spPr>
+        <p:txBody>
+          <a:bodyPr wrap="square" rtlCol="0" anchor="ctr"/>
+          <a:lstStyle/>
+          <a:p>
+            <a:pPr indent="0" marL="0">
+              <a:buNone/>
+            </a:pPr>
+            <a:endParaRPr lang="en-US" dirty="0"/>
+          </a:p>
+        </p:txBody>
+      </p:sp>
+      <p:sp>
+        <p:nvSpPr>
+          <p:cNvPr id="3" name="Text 1"/>
+          <p:cNvSpPr/>
+          <p:nvPr/>
+        </p:nvSpPr>
+        <p:spPr>
+          <a:xfrm>
+            <a:off x="406301" y="457051"/>
+            <a:ext cx="8498026" cy="274290"/>
+          </a:xfrm>
+          <a:prstGeom prst="rect">
+            <a:avLst/>
+          </a:prstGeom>
+          <a:noFill/>
+          <a:ln/>
+        </p:spPr>
+        <p:txBody>
+          <a:bodyPr wrap="square" lIns="0" tIns="0" rIns="0" bIns="0" rtlCol="0" anchor="t"/>
+          <a:lstStyle/>
+          <a:p>
+            <a:pPr algn="l" indent="0" marL="0">
+              <a:lnSpc>
+                <a:spcPts val="2160"/>
+              </a:lnSpc>
+              <a:spcBef>
+                <a:spcPts val="600"/>
+              </a:spcBef>
+              <a:spcAft>
+                <a:spcPts val="800"/>
+              </a:spcAft>
+              <a:buNone/>
+            </a:pPr>
+            <a:r>
+              <a:rPr lang="en-US" sz="1800" b="1" dirty="0">
+                <a:solidFill>
+                  <a:srgbClr val="FE4447"/>
+                </a:solidFill>
+                <a:latin typeface="Georgia" pitchFamily="34" charset="0"/>
+                <a:ea typeface="Georgia" pitchFamily="34" charset="-122"/>
+                <a:cs typeface="Georgia" pitchFamily="34" charset="-120"/>
+              </a:rPr>
+              <a:t>Differentiation</a:t>
+            </a:r>
+            <a:endParaRPr lang="en-US" sz="1800" dirty="0"/>
+          </a:p>
+        </p:txBody>
+      </p:sp>
+      <p:sp>
+        <p:nvSpPr>
+          <p:cNvPr id="4" name="Text 2"/>
+          <p:cNvSpPr/>
+          <p:nvPr/>
+        </p:nvSpPr>
+        <p:spPr>
+          <a:xfrm>
+            <a:off x="634901" y="883593"/>
+            <a:ext cx="8102798" cy="731341"/>
+          </a:xfrm>
+          <a:prstGeom prst="rect">
+            <a:avLst/>
+          </a:prstGeom>
+          <a:noFill/>
+          <a:ln/>
+        </p:spPr>
+        <p:txBody>
+          <a:bodyPr wrap="square" lIns="0" tIns="0" rIns="0" bIns="0" rtlCol="0" anchor="t"/>
+          <a:lstStyle/>
+          <a:p>
+            <a:pPr algn="l" marL="342900" indent="-342900">
+              <a:lnSpc>
+                <a:spcPts val="1620"/>
+              </a:lnSpc>
+              <a:spcAft>
+                <a:spcPts val="300"/>
+              </a:spcAft>
+              <a:buSzPct val="100000"/>
+              <a:buChar char="•"/>
+            </a:pPr>
+            <a:r>
+              <a:rPr lang="en-US" sz="1200" b="1" dirty="0">
+                <a:solidFill>
+                  <a:srgbClr val="1C2833"/>
+                </a:solidFill>
+                <a:latin typeface="Arial" pitchFamily="34" charset="0"/>
+                <a:ea typeface="Arial" pitchFamily="34" charset="-122"/>
+                <a:cs typeface="Arial" pitchFamily="34" charset="-120"/>
+              </a:rPr>
+              <a:t>One tier up:</a:t>
+            </a:r>
+            <a:pPr algn="l" indent="0" marL="0">
+              <a:lnSpc>
+                <a:spcPts val="1620"/>
+              </a:lnSpc>
+              <a:spcAft>
+                <a:spcPts val="300"/>
+              </a:spcAft>
+              <a:buNone/>
+            </a:pPr>
+            <a:r>
+              <a:rPr lang="en-US" sz="1200" dirty="0">
+                <a:solidFill>
+                  <a:srgbClr val="1C2833"/>
+                </a:solidFill>
+                <a:latin typeface="Arial" pitchFamily="34" charset="0"/>
+                <a:ea typeface="Arial" pitchFamily="34" charset="-122"/>
+                <a:cs typeface="Arial" pitchFamily="34" charset="-120"/>
+              </a:rPr>
+              <a:t> Add a </a:t>
+            </a:r>
+            <a:pPr algn="l" indent="0" marL="0">
+              <a:lnSpc>
+                <a:spcPts val="1620"/>
+              </a:lnSpc>
+              <a:spcAft>
+                <a:spcPts val="300"/>
+              </a:spcAft>
+              <a:buNone/>
+            </a:pPr>
+            <a:r>
               <a:rPr lang="en-US" sz="1200" i="1" dirty="0">
                 <a:solidFill>
                   <a:srgbClr val="1C2833"/>
@@ -1938,8 +4041,97 @@
                 <a:ea typeface="Arial" pitchFamily="34" charset="-122"/>
                 <a:cs typeface="Arial" pitchFamily="34" charset="-120"/>
               </a:rPr>
-              <a:t>complete</a:t>
-            </a:r>
+              <a:t>modern-science parallel</a:t>
+            </a:r>
+            <a:pPr algn="l" indent="0" marL="0">
+              <a:lnSpc>
+                <a:spcPts val="1620"/>
+              </a:lnSpc>
+              <a:spcAft>
+                <a:spcPts val="300"/>
+              </a:spcAft>
+              <a:buNone/>
+            </a:pPr>
+            <a:r>
+              <a:rPr lang="en-US" sz="1200" dirty="0">
+                <a:solidFill>
+                  <a:srgbClr val="1C2833"/>
+                </a:solidFill>
+                <a:latin typeface="Arial" pitchFamily="34" charset="0"/>
+                <a:ea typeface="Arial" pitchFamily="34" charset="-122"/>
+                <a:cs typeface="Arial" pitchFamily="34" charset="-120"/>
+              </a:rPr>
+              <a:t> (chronobiology / digestion / sleep research) to your presentation. One sentence.</a:t>
+            </a:r>
+            <a:endParaRPr lang="en-US" sz="1200" dirty="0"/>
+          </a:p>
+          <a:p>
+            <a:pPr algn="l" marL="342900" indent="-342900">
+              <a:lnSpc>
+                <a:spcPts val="1620"/>
+              </a:lnSpc>
+              <a:spcAft>
+                <a:spcPts val="300"/>
+              </a:spcAft>
+              <a:buSzPct val="100000"/>
+              <a:buChar char="•"/>
+            </a:pPr>
+            <a:r>
+              <a:rPr lang="en-US" sz="1200" b="1" dirty="0">
+                <a:solidFill>
+                  <a:srgbClr val="1C2833"/>
+                </a:solidFill>
+                <a:latin typeface="Arial" pitchFamily="34" charset="0"/>
+                <a:ea typeface="Arial" pitchFamily="34" charset="-122"/>
+                <a:cs typeface="Arial" pitchFamily="34" charset="-120"/>
+              </a:rPr>
+              <a:t>One tier down:</a:t>
+            </a:r>
+            <a:pPr algn="l" indent="0" marL="0">
+              <a:lnSpc>
+                <a:spcPts val="1620"/>
+              </a:lnSpc>
+              <a:spcAft>
+                <a:spcPts val="300"/>
+              </a:spcAft>
+              <a:buNone/>
+            </a:pPr>
+            <a:r>
+              <a:rPr lang="en-US" sz="1200" dirty="0">
+                <a:solidFill>
+                  <a:srgbClr val="1C2833"/>
+                </a:solidFill>
+                <a:latin typeface="Arial" pitchFamily="34" charset="0"/>
+                <a:ea typeface="Arial" pitchFamily="34" charset="-122"/>
+                <a:cs typeface="Arial" pitchFamily="34" charset="-120"/>
+              </a:rPr>
+              <a:t> Focus on three days, not five. Memorise the artefact's three key points.</a:t>
+            </a:r>
+            <a:endParaRPr lang="en-US" sz="1200" dirty="0"/>
+          </a:p>
+        </p:txBody>
+      </p:sp>
+      <p:sp>
+        <p:nvSpPr>
+          <p:cNvPr id="5" name="Text 3"/>
+          <p:cNvSpPr/>
+          <p:nvPr/>
+        </p:nvSpPr>
+        <p:spPr>
+          <a:xfrm>
+            <a:off x="406301" y="4434929"/>
+            <a:ext cx="8498026" cy="213271"/>
+          </a:xfrm>
+          <a:prstGeom prst="rect">
+            <a:avLst/>
+          </a:prstGeom>
+          <a:noFill/>
+          <a:ln/>
+        </p:spPr>
+        <p:txBody>
+          <a:bodyPr wrap="square" lIns="0" tIns="0" rIns="0" bIns="0" rtlCol="0" anchor="t"/>
+          <a:lstStyle/>
+          <a:p>
             <a:pPr algn="l" indent="0" marL="0">
               <a:lnSpc>
                 <a:spcPts val="1680"/>
@@ -1961,15 +4153,423 @@
                 <a:ea typeface="Arial" pitchFamily="34" charset="-122"/>
                 <a:cs typeface="Arial" pitchFamily="34" charset="-120"/>
               </a:rPr>
-              <a:t> artefact (poster / script / draft video plan / infographic), citation visible, and a rehearsed 3-minute version of their presentation.</a:t>
+              <a:t>Middle ·  · IKS Curriculum</a:t>
             </a:r>
             <a:endParaRPr lang="en-US" sz="1200" dirty="0"/>
           </a:p>
         </p:txBody>
       </p:sp>
-      <p:sp>
-        <p:nvSpPr>
-          <p:cNvPr id="7" name="Text 5"/>
+    </p:spTree>
+  </p:cSld>
+  <p:clrMapOvr>
+    <a:masterClrMapping/>
+  </p:clrMapOvr>
+</p:sld>
+</file>
+
+<file path=ppt/slides/slide15.xml><?xml version="1.0" encoding="utf-8"?>
+<p:sld xmlns:a="http://schemas.openxmlformats.org/drawingml/2006/main" xmlns:r="http://schemas.openxmlformats.org/officeDocument/2006/relationships" xmlns:p="http://schemas.openxmlformats.org/presentationml/2006/main">
+  <p:cSld name="Slide 15">
+    <p:bg>
+      <p:bgPr>
+        <a:solidFill>
+          <a:srgbClr val="FFFFFF"/>
+        </a:solidFill>
+      </p:bgPr>
+    </p:bg>
+    <p:spTree>
+      <p:nvGrpSpPr>
+        <p:cNvPr id="1" name=""/>
+        <p:cNvGrpSpPr/>
+        <p:nvPr/>
+      </p:nvGrpSpPr>
+      <p:grpSpPr>
+        <a:xfrm>
+          <a:off x="0" y="0"/>
+          <a:ext cx="0" cy="0"/>
+          <a:chOff x="0" y="0"/>
+          <a:chExt cx="0" cy="0"/>
+        </a:xfrm>
+      </p:grpSpPr>
+      <p:sp>
+        <p:nvSpPr>
+          <p:cNvPr id="2" name="Text 0"/>
+          <p:cNvSpPr/>
+          <p:nvPr/>
+        </p:nvSpPr>
+        <p:spPr>
+          <a:xfrm>
+            <a:off x="0" y="0"/>
+            <a:ext cx="9144000" cy="101501"/>
+          </a:xfrm>
+          <a:prstGeom prst="rect">
+            <a:avLst/>
+          </a:prstGeom>
+          <a:solidFill>
+            <a:srgbClr val="277884"/>
+          </a:solidFill>
+          <a:ln/>
+        </p:spPr>
+        <p:txBody>
+          <a:bodyPr wrap="square" rtlCol="0" anchor="ctr"/>
+          <a:lstStyle/>
+          <a:p>
+            <a:pPr indent="0" marL="0">
+              <a:buNone/>
+            </a:pPr>
+            <a:endParaRPr lang="en-US" dirty="0"/>
+          </a:p>
+        </p:txBody>
+      </p:sp>
+      <p:sp>
+        <p:nvSpPr>
+          <p:cNvPr id="3" name="Text 1"/>
+          <p:cNvSpPr/>
+          <p:nvPr/>
+        </p:nvSpPr>
+        <p:spPr>
+          <a:xfrm>
+            <a:off x="406301" y="457051"/>
+            <a:ext cx="8498026" cy="274290"/>
+          </a:xfrm>
+          <a:prstGeom prst="rect">
+            <a:avLst/>
+          </a:prstGeom>
+          <a:noFill/>
+          <a:ln/>
+        </p:spPr>
+        <p:txBody>
+          <a:bodyPr wrap="square" lIns="0" tIns="0" rIns="0" bIns="0" rtlCol="0" anchor="t"/>
+          <a:lstStyle/>
+          <a:p>
+            <a:pPr algn="l" indent="0" marL="0">
+              <a:lnSpc>
+                <a:spcPts val="2160"/>
+              </a:lnSpc>
+              <a:spcBef>
+                <a:spcPts val="600"/>
+              </a:spcBef>
+              <a:spcAft>
+                <a:spcPts val="800"/>
+              </a:spcAft>
+              <a:buNone/>
+            </a:pPr>
+            <a:r>
+              <a:rPr lang="en-US" sz="1800" b="1" dirty="0">
+                <a:solidFill>
+                  <a:srgbClr val="FE4447"/>
+                </a:solidFill>
+                <a:latin typeface="Georgia" pitchFamily="34" charset="0"/>
+                <a:ea typeface="Georgia" pitchFamily="34" charset="-122"/>
+                <a:cs typeface="Georgia" pitchFamily="34" charset="-120"/>
+              </a:rPr>
+              <a:t>Teacher notes</a:t>
+            </a:r>
+            <a:endParaRPr lang="en-US" sz="1800" dirty="0"/>
+          </a:p>
+        </p:txBody>
+      </p:sp>
+      <p:sp>
+        <p:nvSpPr>
+          <p:cNvPr id="4" name="Text 2"/>
+          <p:cNvSpPr/>
+          <p:nvPr/>
+        </p:nvSpPr>
+        <p:spPr>
+          <a:xfrm>
+            <a:off x="634901" y="883593"/>
+            <a:ext cx="8102798" cy="975122"/>
+          </a:xfrm>
+          <a:prstGeom prst="rect">
+            <a:avLst/>
+          </a:prstGeom>
+          <a:noFill/>
+          <a:ln/>
+        </p:spPr>
+        <p:txBody>
+          <a:bodyPr wrap="square" lIns="0" tIns="0" rIns="0" bIns="0" rtlCol="0" anchor="t"/>
+          <a:lstStyle/>
+          <a:p>
+            <a:pPr algn="l" marL="342900" indent="-342900">
+              <a:lnSpc>
+                <a:spcPts val="1620"/>
+              </a:lnSpc>
+              <a:spcAft>
+                <a:spcPts val="300"/>
+              </a:spcAft>
+              <a:buSzPct val="100000"/>
+              <a:buChar char="•"/>
+            </a:pPr>
+            <a:r>
+              <a:rPr lang="en-US" sz="1200" dirty="0">
+                <a:solidFill>
+                  <a:srgbClr val="1C2833"/>
+                </a:solidFill>
+                <a:latin typeface="Arial" pitchFamily="34" charset="0"/>
+                <a:ea typeface="Arial" pitchFamily="34" charset="-122"/>
+                <a:cs typeface="Arial" pitchFamily="34" charset="-120"/>
+              </a:rPr>
+              <a:t>Some students freeze in the build phase. Hand them a poster paper and a marker and ask: "what's the first thing you'd draw?" Get them moving.</a:t>
+            </a:r>
+            <a:endParaRPr lang="en-US" sz="1200" dirty="0"/>
+          </a:p>
+          <a:p>
+            <a:pPr algn="l" marL="342900" indent="-342900">
+              <a:lnSpc>
+                <a:spcPts val="1620"/>
+              </a:lnSpc>
+              <a:spcAft>
+                <a:spcPts val="300"/>
+              </a:spcAft>
+              <a:buSzPct val="100000"/>
+              <a:buChar char="•"/>
+            </a:pPr>
+            <a:r>
+              <a:rPr lang="en-US" sz="1200" dirty="0">
+                <a:solidFill>
+                  <a:srgbClr val="1C2833"/>
+                </a:solidFill>
+                <a:latin typeface="Arial" pitchFamily="34" charset="0"/>
+                <a:ea typeface="Arial" pitchFamily="34" charset="-122"/>
+                <a:cs typeface="Arial" pitchFamily="34" charset="-120"/>
+              </a:rPr>
+              <a:t>Watch for groups where one student does all the work. Equalise contribution.</a:t>
+            </a:r>
+            <a:endParaRPr lang="en-US" sz="1200" dirty="0"/>
+          </a:p>
+          <a:p>
+            <a:pPr algn="l" marL="342900" indent="-342900">
+              <a:lnSpc>
+                <a:spcPts val="1620"/>
+              </a:lnSpc>
+              <a:spcAft>
+                <a:spcPts val="300"/>
+              </a:spcAft>
+              <a:buSzPct val="100000"/>
+              <a:buChar char="•"/>
+            </a:pPr>
+            <a:r>
+              <a:rPr lang="en-US" sz="1200" dirty="0">
+                <a:solidFill>
+                  <a:srgbClr val="1C2833"/>
+                </a:solidFill>
+                <a:latin typeface="Arial" pitchFamily="34" charset="0"/>
+                <a:ea typeface="Arial" pitchFamily="34" charset="-122"/>
+                <a:cs typeface="Arial" pitchFamily="34" charset="-120"/>
+              </a:rPr>
+              <a:t>Last-minute additions ("can I also include this herb?") — refuse politely. The scope was set.</a:t>
+            </a:r>
+            <a:endParaRPr lang="en-US" sz="1200" dirty="0"/>
+          </a:p>
+        </p:txBody>
+      </p:sp>
+      <p:sp>
+        <p:nvSpPr>
+          <p:cNvPr id="5" name="Text 3"/>
+          <p:cNvSpPr/>
+          <p:nvPr/>
+        </p:nvSpPr>
+        <p:spPr>
+          <a:xfrm>
+            <a:off x="406301" y="4434929"/>
+            <a:ext cx="8498026" cy="213271"/>
+          </a:xfrm>
+          <a:prstGeom prst="rect">
+            <a:avLst/>
+          </a:prstGeom>
+          <a:noFill/>
+          <a:ln/>
+        </p:spPr>
+        <p:txBody>
+          <a:bodyPr wrap="square" lIns="0" tIns="0" rIns="0" bIns="0" rtlCol="0" anchor="t"/>
+          <a:lstStyle/>
+          <a:p>
+            <a:pPr algn="l" indent="0" marL="0">
+              <a:lnSpc>
+                <a:spcPts val="1680"/>
+              </a:lnSpc>
+              <a:spcBef>
+                <a:spcPts val="300"/>
+              </a:spcBef>
+              <a:spcAft>
+                <a:spcPts val="300"/>
+              </a:spcAft>
+              <a:buNone/>
+            </a:pPr>
+            <a:r>
+              <a:rPr lang="en-US" sz="1200" dirty="0">
+                <a:solidFill>
+                  <a:srgbClr val="1C2833"/>
+                </a:solidFill>
+                <a:latin typeface="Arial" pitchFamily="34" charset="0"/>
+                <a:ea typeface="Arial" pitchFamily="34" charset="-122"/>
+                <a:cs typeface="Arial" pitchFamily="34" charset="-120"/>
+              </a:rPr>
+              <a:t>Middle ·  · IKS Curriculum</a:t>
+            </a:r>
+            <a:endParaRPr lang="en-US" sz="1200" dirty="0"/>
+          </a:p>
+        </p:txBody>
+      </p:sp>
+    </p:spTree>
+  </p:cSld>
+  <p:clrMapOvr>
+    <a:masterClrMapping/>
+  </p:clrMapOvr>
+</p:sld>
+</file>
+
+<file path=ppt/slides/slide16.xml><?xml version="1.0" encoding="utf-8"?>
+<p:sld xmlns:a="http://schemas.openxmlformats.org/drawingml/2006/main" xmlns:r="http://schemas.openxmlformats.org/officeDocument/2006/relationships" xmlns:p="http://schemas.openxmlformats.org/presentationml/2006/main">
+  <p:cSld name="Slide 16">
+    <p:bg>
+      <p:bgPr>
+        <a:solidFill>
+          <a:srgbClr val="FFFFFF"/>
+        </a:solidFill>
+      </p:bgPr>
+    </p:bg>
+    <p:spTree>
+      <p:nvGrpSpPr>
+        <p:cNvPr id="1" name=""/>
+        <p:cNvGrpSpPr/>
+        <p:nvPr/>
+      </p:nvGrpSpPr>
+      <p:grpSpPr>
+        <a:xfrm>
+          <a:off x="0" y="0"/>
+          <a:ext cx="0" cy="0"/>
+          <a:chOff x="0" y="0"/>
+          <a:chExt cx="0" cy="0"/>
+        </a:xfrm>
+      </p:grpSpPr>
+      <p:sp>
+        <p:nvSpPr>
+          <p:cNvPr id="2" name="Text 0"/>
+          <p:cNvSpPr/>
+          <p:nvPr/>
+        </p:nvSpPr>
+        <p:spPr>
+          <a:xfrm>
+            <a:off x="0" y="0"/>
+            <a:ext cx="9144000" cy="101501"/>
+          </a:xfrm>
+          <a:prstGeom prst="rect">
+            <a:avLst/>
+          </a:prstGeom>
+          <a:solidFill>
+            <a:srgbClr val="277884"/>
+          </a:solidFill>
+          <a:ln/>
+        </p:spPr>
+        <p:txBody>
+          <a:bodyPr wrap="square" rtlCol="0" anchor="ctr"/>
+          <a:lstStyle/>
+          <a:p>
+            <a:pPr indent="0" marL="0">
+              <a:buNone/>
+            </a:pPr>
+            <a:endParaRPr lang="en-US" dirty="0"/>
+          </a:p>
+        </p:txBody>
+      </p:sp>
+      <p:sp>
+        <p:nvSpPr>
+          <p:cNvPr id="3" name="Text 1"/>
+          <p:cNvSpPr/>
+          <p:nvPr/>
+        </p:nvSpPr>
+        <p:spPr>
+          <a:xfrm>
+            <a:off x="406301" y="457051"/>
+            <a:ext cx="8498026" cy="274290"/>
+          </a:xfrm>
+          <a:prstGeom prst="rect">
+            <a:avLst/>
+          </a:prstGeom>
+          <a:noFill/>
+          <a:ln/>
+        </p:spPr>
+        <p:txBody>
+          <a:bodyPr wrap="square" lIns="0" tIns="0" rIns="0" bIns="0" rtlCol="0" anchor="t"/>
+          <a:lstStyle/>
+          <a:p>
+            <a:pPr algn="l" indent="0" marL="0">
+              <a:lnSpc>
+                <a:spcPts val="2160"/>
+              </a:lnSpc>
+              <a:spcBef>
+                <a:spcPts val="600"/>
+              </a:spcBef>
+              <a:spcAft>
+                <a:spcPts val="800"/>
+              </a:spcAft>
+              <a:buNone/>
+            </a:pPr>
+            <a:r>
+              <a:rPr lang="en-US" sz="1800" b="1" dirty="0">
+                <a:solidFill>
+                  <a:srgbClr val="FE4447"/>
+                </a:solidFill>
+                <a:latin typeface="Georgia" pitchFamily="34" charset="0"/>
+                <a:ea typeface="Georgia" pitchFamily="34" charset="-122"/>
+                <a:cs typeface="Georgia" pitchFamily="34" charset="-120"/>
+              </a:rPr>
+              <a:t>Citation(s) used in this lesson</a:t>
+            </a:r>
+            <a:endParaRPr lang="en-US" sz="1800" dirty="0"/>
+          </a:p>
+        </p:txBody>
+      </p:sp>
+      <p:sp>
+        <p:nvSpPr>
+          <p:cNvPr id="4" name="Text 2"/>
+          <p:cNvSpPr/>
+          <p:nvPr/>
+        </p:nvSpPr>
+        <p:spPr>
+          <a:xfrm>
+            <a:off x="634901" y="883593"/>
+            <a:ext cx="8102798" cy="281880"/>
+          </a:xfrm>
+          <a:prstGeom prst="rect">
+            <a:avLst/>
+          </a:prstGeom>
+          <a:noFill/>
+          <a:ln/>
+        </p:spPr>
+        <p:txBody>
+          <a:bodyPr wrap="square" lIns="0" tIns="0" rIns="0" bIns="0" rtlCol="0" anchor="t"/>
+          <a:lstStyle/>
+          <a:p>
+            <a:pPr algn="l" marL="342900" indent="-342900">
+              <a:lnSpc>
+                <a:spcPts val="1620"/>
+              </a:lnSpc>
+              <a:spcAft>
+                <a:spcPts val="300"/>
+              </a:spcAft>
+              <a:buSzPct val="100000"/>
+              <a:buChar char="•"/>
+            </a:pPr>
+            <a:r>
+              <a:rPr lang="en-US" sz="1200" dirty="0">
+                <a:solidFill>
+                  <a:srgbClr val="1C2833"/>
+                </a:solidFill>
+                <a:latin typeface="Arial" pitchFamily="34" charset="0"/>
+                <a:ea typeface="Arial" pitchFamily="34" charset="-122"/>
+                <a:cs typeface="Arial" pitchFamily="34" charset="-120"/>
+              </a:rPr>
+              <a:t>No new citations.</a:t>
+            </a:r>
+            <a:endParaRPr lang="en-US" sz="1200" dirty="0"/>
+          </a:p>
+        </p:txBody>
+      </p:sp>
+      <p:sp>
+        <p:nvSpPr>
+          <p:cNvPr id="5" name="Text 3"/>
           <p:cNvSpPr/>
           <p:nvPr/>
         </p:nvSpPr>
@@ -2119,7 +4719,7 @@
                 <a:ea typeface="Georgia" pitchFamily="34" charset="-122"/>
                 <a:cs typeface="Georgia" pitchFamily="34" charset="-120"/>
               </a:rPr>
-              <a:t>Materials</a:t>
+              <a:t>Learning objective</a:t>
             </a:r>
             <a:endParaRPr lang="en-US" sz="1800" dirty="0"/>
           </a:p>
@@ -2167,7 +4767,53 @@
                 <a:ea typeface="Arial" pitchFamily="34" charset="-122"/>
                 <a:cs typeface="Arial" pitchFamily="34" charset="-120"/>
               </a:rPr>
-              <a:t>– Project supplies: poster paper, markers, scissors, glue, printer access if needed – Each student's Day-8 plan – A visible timer for the 3-minute rehearsal</a:t>
+              <a:t>By the end of this lesson, every student has a </a:t>
+            </a:r>
+            <a:pPr algn="l" indent="0" marL="0">
+              <a:lnSpc>
+                <a:spcPts val="1680"/>
+              </a:lnSpc>
+              <a:spcBef>
+                <a:spcPts val="300"/>
+              </a:spcBef>
+              <a:spcAft>
+                <a:spcPts val="300"/>
+              </a:spcAft>
+              <a:buNone/>
+            </a:pPr>
+            <a:r>
+              <a:rPr lang="en-US" sz="1200" i="1" dirty="0">
+                <a:solidFill>
+                  <a:srgbClr val="1C2833"/>
+                </a:solidFill>
+                <a:latin typeface="Arial" pitchFamily="34" charset="0"/>
+                <a:ea typeface="Arial" pitchFamily="34" charset="-122"/>
+                <a:cs typeface="Arial" pitchFamily="34" charset="-120"/>
+              </a:rPr>
+              <a:t>complete</a:t>
+            </a:r>
+            <a:pPr algn="l" indent="0" marL="0">
+              <a:lnSpc>
+                <a:spcPts val="1680"/>
+              </a:lnSpc>
+              <a:spcBef>
+                <a:spcPts val="300"/>
+              </a:spcBef>
+              <a:spcAft>
+                <a:spcPts val="300"/>
+              </a:spcAft>
+              <a:buNone/>
+            </a:pPr>
+            <a:r>
+              <a:rPr lang="en-US" sz="1200" dirty="0">
+                <a:solidFill>
+                  <a:srgbClr val="1C2833"/>
+                </a:solidFill>
+                <a:latin typeface="Arial" pitchFamily="34" charset="0"/>
+                <a:ea typeface="Arial" pitchFamily="34" charset="-122"/>
+                <a:cs typeface="Arial" pitchFamily="34" charset="-120"/>
+              </a:rPr>
+              <a:t> artefact (poster / script / draft video plan / infographic), citation visible, and a rehearsed 3-minute version of their presentation.</a:t>
             </a:r>
             <a:endParaRPr lang="en-US" sz="1200" dirty="0"/>
           </a:p>
@@ -2325,7 +4971,7 @@
                 <a:ea typeface="Georgia" pitchFamily="34" charset="-122"/>
                 <a:cs typeface="Georgia" pitchFamily="34" charset="-120"/>
               </a:rPr>
-              <a:t>Lesson flow</a:t>
+              <a:t>Materials</a:t>
             </a:r>
             <a:endParaRPr lang="en-US" sz="1800" dirty="0"/>
           </a:p>
@@ -2334,6 +4980,100 @@
       <p:sp>
         <p:nvSpPr>
           <p:cNvPr id="4" name="Text 2"/>
+          <p:cNvSpPr/>
+          <p:nvPr/>
+        </p:nvSpPr>
+        <p:spPr>
+          <a:xfrm>
+            <a:off x="634901" y="883593"/>
+            <a:ext cx="8102798" cy="769441"/>
+          </a:xfrm>
+          <a:prstGeom prst="rect">
+            <a:avLst/>
+          </a:prstGeom>
+          <a:noFill/>
+          <a:ln/>
+        </p:spPr>
+        <p:txBody>
+          <a:bodyPr wrap="square" lIns="0" tIns="0" rIns="0" bIns="0" rtlCol="0" anchor="t"/>
+          <a:lstStyle/>
+          <a:p>
+            <a:pPr algn="l" marL="342900" indent="-342900">
+              <a:lnSpc>
+                <a:spcPts val="1620"/>
+              </a:lnSpc>
+              <a:spcAft>
+                <a:spcPts val="300"/>
+              </a:spcAft>
+              <a:buSzPct val="100000"/>
+              <a:buChar char="•"/>
+            </a:pPr>
+            <a:r>
+              <a:rPr lang="en-US" sz="1200" dirty="0">
+                <a:solidFill>
+                  <a:srgbClr val="1C2833"/>
+                </a:solidFill>
+                <a:latin typeface="Arial" pitchFamily="34" charset="0"/>
+                <a:ea typeface="Arial" pitchFamily="34" charset="-122"/>
+                <a:cs typeface="Arial" pitchFamily="34" charset="-120"/>
+              </a:rPr>
+              <a:t>Project supplies: poster paper, markers, scissors, glue, printer access if needed</a:t>
+            </a:r>
+            <a:endParaRPr lang="en-US" sz="1200" dirty="0"/>
+          </a:p>
+          <a:p>
+            <a:pPr algn="l" marL="342900" indent="-342900">
+              <a:lnSpc>
+                <a:spcPts val="1620"/>
+              </a:lnSpc>
+              <a:spcAft>
+                <a:spcPts val="300"/>
+              </a:spcAft>
+              <a:buSzPct val="100000"/>
+              <a:buChar char="•"/>
+            </a:pPr>
+            <a:r>
+              <a:rPr lang="en-US" sz="1200" dirty="0">
+                <a:solidFill>
+                  <a:srgbClr val="1C2833"/>
+                </a:solidFill>
+                <a:latin typeface="Arial" pitchFamily="34" charset="0"/>
+                <a:ea typeface="Arial" pitchFamily="34" charset="-122"/>
+                <a:cs typeface="Arial" pitchFamily="34" charset="-120"/>
+              </a:rPr>
+              <a:t>Each student's Day-8 plan</a:t>
+            </a:r>
+            <a:endParaRPr lang="en-US" sz="1200" dirty="0"/>
+          </a:p>
+          <a:p>
+            <a:pPr algn="l" marL="342900" indent="-342900">
+              <a:lnSpc>
+                <a:spcPts val="1620"/>
+              </a:lnSpc>
+              <a:spcAft>
+                <a:spcPts val="300"/>
+              </a:spcAft>
+              <a:buSzPct val="100000"/>
+              <a:buChar char="•"/>
+            </a:pPr>
+            <a:r>
+              <a:rPr lang="en-US" sz="1200" dirty="0">
+                <a:solidFill>
+                  <a:srgbClr val="1C2833"/>
+                </a:solidFill>
+                <a:latin typeface="Arial" pitchFamily="34" charset="0"/>
+                <a:ea typeface="Arial" pitchFamily="34" charset="-122"/>
+                <a:cs typeface="Arial" pitchFamily="34" charset="-120"/>
+              </a:rPr>
+              <a:t>A visible timer for the 3-minute rehearsal</a:t>
+            </a:r>
+            <a:endParaRPr lang="en-US" sz="1200" dirty="0"/>
+          </a:p>
+        </p:txBody>
+      </p:sp>
+      <p:sp>
+        <p:nvSpPr>
+          <p:cNvPr id="5" name="Text 3"/>
           <p:cNvSpPr/>
           <p:nvPr/>
         </p:nvSpPr>
@@ -2483,7 +5223,7 @@
                 <a:ea typeface="Georgia" pitchFamily="34" charset="-122"/>
                 <a:cs typeface="Georgia" pitchFamily="34" charset="-120"/>
               </a:rPr>
-              <a:t>Warm-up (5 min)</a:t>
+              <a:t>Lesson flow</a:t>
             </a:r>
             <a:endParaRPr lang="en-US" sz="1800" dirty="0"/>
           </a:p>
@@ -2492,100 +5232,6 @@
       <p:sp>
         <p:nvSpPr>
           <p:cNvPr id="4" name="Text 2"/>
-          <p:cNvSpPr/>
-          <p:nvPr/>
-        </p:nvSpPr>
-        <p:spPr>
-          <a:xfrm>
-            <a:off x="634901" y="883593"/>
-            <a:ext cx="8102798" cy="281880"/>
-          </a:xfrm>
-          <a:prstGeom prst="rect">
-            <a:avLst/>
-          </a:prstGeom>
-          <a:noFill/>
-          <a:ln/>
-        </p:spPr>
-        <p:txBody>
-          <a:bodyPr wrap="square" lIns="0" tIns="0" rIns="0" bIns="0" rtlCol="0" anchor="t"/>
-          <a:lstStyle/>
-          <a:p>
-            <a:pPr algn="l" marL="342900" indent="-342900">
-              <a:lnSpc>
-                <a:spcPts val="1620"/>
-              </a:lnSpc>
-              <a:spcAft>
-                <a:spcPts val="300"/>
-              </a:spcAft>
-              <a:buSzPct val="100000"/>
-              <a:buChar char="•"/>
-            </a:pPr>
-            <a:r>
-              <a:rPr lang="en-US" sz="1200" i="1" dirty="0">
-                <a:solidFill>
-                  <a:srgbClr val="1C2833"/>
-                </a:solidFill>
-                <a:latin typeface="Arial" pitchFamily="34" charset="0"/>
-                <a:ea typeface="Arial" pitchFamily="34" charset="-122"/>
-                <a:cs typeface="Arial" pitchFamily="34" charset="-120"/>
-              </a:rPr>
-              <a:t>"Show your partner your plan. In ONE word, tell them what you're going to make."</a:t>
-            </a:r>
-            <a:endParaRPr lang="en-US" sz="1200" dirty="0"/>
-          </a:p>
-        </p:txBody>
-      </p:sp>
-      <p:sp>
-        <p:nvSpPr>
-          <p:cNvPr id="5" name="Text 3"/>
-          <p:cNvSpPr/>
-          <p:nvPr/>
-        </p:nvSpPr>
-        <p:spPr>
-          <a:xfrm>
-            <a:off x="406301" y="1254323"/>
-            <a:ext cx="8498026" cy="213271"/>
-          </a:xfrm>
-          <a:prstGeom prst="rect">
-            <a:avLst/>
-          </a:prstGeom>
-          <a:noFill/>
-          <a:ln/>
-        </p:spPr>
-        <p:txBody>
-          <a:bodyPr wrap="square" lIns="0" tIns="0" rIns="0" bIns="0" rtlCol="0" anchor="t"/>
-          <a:lstStyle/>
-          <a:p>
-            <a:pPr algn="l" indent="0" marL="0">
-              <a:lnSpc>
-                <a:spcPts val="1680"/>
-              </a:lnSpc>
-              <a:spcBef>
-                <a:spcPts val="300"/>
-              </a:spcBef>
-              <a:spcAft>
-                <a:spcPts val="300"/>
-              </a:spcAft>
-              <a:buNone/>
-            </a:pPr>
-            <a:r>
-              <a:rPr lang="en-US" sz="1200" dirty="0">
-                <a:solidFill>
-                  <a:srgbClr val="1C2833"/>
-                </a:solidFill>
-                <a:latin typeface="Arial" pitchFamily="34" charset="0"/>
-                <a:ea typeface="Arial" pitchFamily="34" charset="-122"/>
-                <a:cs typeface="Arial" pitchFamily="34" charset="-120"/>
-              </a:rPr>
-              <a:t>– Quick check — anyone missing yesterday? Pair them up with a willing teacher-helper.</a:t>
-            </a:r>
-            <a:endParaRPr lang="en-US" sz="1200" dirty="0"/>
-          </a:p>
-        </p:txBody>
-      </p:sp>
-      <p:sp>
-        <p:nvSpPr>
-          <p:cNvPr id="6" name="Text 4"/>
           <p:cNvSpPr/>
           <p:nvPr/>
         </p:nvSpPr>
@@ -2735,7 +5381,7 @@
                 <a:ea typeface="Georgia" pitchFamily="34" charset="-122"/>
                 <a:cs typeface="Georgia" pitchFamily="34" charset="-120"/>
               </a:rPr>
-              <a:t>Wrap-up (5 min)</a:t>
+              <a:t>Warm-up (5 min)</a:t>
             </a:r>
             <a:endParaRPr lang="en-US" sz="1800" dirty="0"/>
           </a:p>
@@ -2749,8 +5395,8 @@
         </p:nvSpPr>
         <p:spPr>
           <a:xfrm>
-            <a:off x="406301" y="870942"/>
-            <a:ext cx="8498026" cy="639812"/>
+            <a:off x="634901" y="883593"/>
+            <a:ext cx="8102798" cy="525661"/>
           </a:xfrm>
           <a:prstGeom prst="rect">
             <a:avLst/>
@@ -2762,17 +5408,39 @@
           <a:bodyPr wrap="square" lIns="0" tIns="0" rIns="0" bIns="0" rtlCol="0" anchor="t"/>
           <a:lstStyle/>
           <a:p>
-            <a:pPr algn="l" indent="0" marL="0">
-              <a:lnSpc>
-                <a:spcPts val="1680"/>
-              </a:lnSpc>
-              <a:spcBef>
-                <a:spcPts val="300"/>
-              </a:spcBef>
-              <a:spcAft>
-                <a:spcPts val="300"/>
-              </a:spcAft>
-              <a:buNone/>
+            <a:pPr algn="l" marL="342900" indent="-342900">
+              <a:lnSpc>
+                <a:spcPts val="1620"/>
+              </a:lnSpc>
+              <a:spcAft>
+                <a:spcPts val="300"/>
+              </a:spcAft>
+              <a:buSzPct val="100000"/>
+              <a:buChar char="•"/>
+            </a:pPr>
+            <a:r>
+              <a:rPr lang="en-US" sz="1200" i="1" dirty="0">
+                <a:solidFill>
+                  <a:srgbClr val="1C2833"/>
+                </a:solidFill>
+                <a:latin typeface="Arial" pitchFamily="34" charset="0"/>
+                <a:ea typeface="Arial" pitchFamily="34" charset="-122"/>
+                <a:cs typeface="Arial" pitchFamily="34" charset="-120"/>
+              </a:rPr>
+              <a:t>"Show your partner your plan. In ONE word, tell them what you're going to make."</a:t>
+            </a:r>
+            <a:endParaRPr lang="en-US" sz="1200" dirty="0"/>
+          </a:p>
+          <a:p>
+            <a:pPr algn="l" marL="342900" indent="-342900">
+              <a:lnSpc>
+                <a:spcPts val="1620"/>
+              </a:lnSpc>
+              <a:spcAft>
+                <a:spcPts val="300"/>
+              </a:spcAft>
+              <a:buSzPct val="100000"/>
+              <a:buChar char="•"/>
             </a:pPr>
             <a:r>
               <a:rPr lang="en-US" sz="1200" dirty="0">
@@ -2783,30 +5451,7 @@
                 <a:ea typeface="Arial" pitchFamily="34" charset="-122"/>
                 <a:cs typeface="Arial" pitchFamily="34" charset="-120"/>
               </a:rPr>
-              <a:t>– Every student raises their artefact and shows the class for 5 seconds (no presenting, just visual). – Submit Day-8 plan + photograph of Day-9 artefact. – Preview Day 10: </a:t>
-            </a:r>
-            <a:pPr algn="l" indent="0" marL="0">
-              <a:lnSpc>
-                <a:spcPts val="1680"/>
-              </a:lnSpc>
-              <a:spcBef>
-                <a:spcPts val="300"/>
-              </a:spcBef>
-              <a:spcAft>
-                <a:spcPts val="300"/>
-              </a:spcAft>
-              <a:buNone/>
-            </a:pPr>
-            <a:r>
-              <a:rPr lang="en-US" sz="1200" i="1" dirty="0">
-                <a:solidFill>
-                  <a:srgbClr val="1C2833"/>
-                </a:solidFill>
-                <a:latin typeface="Arial" pitchFamily="34" charset="0"/>
-                <a:ea typeface="Arial" pitchFamily="34" charset="-122"/>
-                <a:cs typeface="Arial" pitchFamily="34" charset="-120"/>
-              </a:rPr>
-              <a:t>"Tomorrow — summative quiz first, then 3-minute presentations. Bring everything."</a:t>
+              <a:t>Quick check — anyone missing yesterday? Pair them up with a willing teacher-helper.</a:t>
             </a:r>
             <a:endParaRPr lang="en-US" sz="1200" dirty="0"/>
           </a:p>
@@ -2964,7 +5609,7 @@
                 <a:ea typeface="Georgia" pitchFamily="34" charset="-122"/>
                 <a:cs typeface="Georgia" pitchFamily="34" charset="-120"/>
               </a:rPr>
-              <a:t>Homework</a:t>
+              <a:t>Core (35 min) — Build + rehearse</a:t>
             </a:r>
             <a:endParaRPr lang="en-US" sz="1800" dirty="0"/>
           </a:p>
@@ -3012,8 +5657,78 @@
                 <a:ea typeface="Arial" pitchFamily="34" charset="-122"/>
                 <a:cs typeface="Arial" pitchFamily="34" charset="-120"/>
               </a:rPr>
-              <a:t>– Memorise the </a:t>
-            </a:r>
+              <a:t>This is a working session. Teacher circulates.</a:t>
+            </a:r>
+            <a:endParaRPr lang="en-US" sz="1200" dirty="0"/>
+          </a:p>
+        </p:txBody>
+      </p:sp>
+      <p:sp>
+        <p:nvSpPr>
+          <p:cNvPr id="5" name="Text 3"/>
+          <p:cNvSpPr/>
+          <p:nvPr/>
+        </p:nvSpPr>
+        <p:spPr>
+          <a:xfrm>
+            <a:off x="406301" y="1198513"/>
+            <a:ext cx="8498026" cy="209550"/>
+          </a:xfrm>
+          <a:prstGeom prst="rect">
+            <a:avLst/>
+          </a:prstGeom>
+          <a:noFill/>
+          <a:ln/>
+        </p:spPr>
+        <p:txBody>
+          <a:bodyPr wrap="square" lIns="0" tIns="0" rIns="0" bIns="0" rtlCol="0" anchor="t"/>
+          <a:lstStyle/>
+          <a:p>
+            <a:pPr algn="l" indent="0" marL="0">
+              <a:spcBef>
+                <a:spcPts val="600"/>
+              </a:spcBef>
+              <a:spcAft>
+                <a:spcPts val="400"/>
+              </a:spcAft>
+              <a:buNone/>
+            </a:pPr>
+            <a:r>
+              <a:rPr lang="en-US" sz="1400" b="1" dirty="0">
+                <a:solidFill>
+                  <a:srgbClr val="1C2833"/>
+                </a:solidFill>
+                <a:latin typeface="Arial" pitchFamily="34" charset="0"/>
+                <a:ea typeface="Arial" pitchFamily="34" charset="-122"/>
+                <a:cs typeface="Arial" pitchFamily="34" charset="-120"/>
+              </a:rPr>
+              <a:t>Phase A — Build (25 min)</a:t>
+            </a:r>
+            <a:endParaRPr lang="en-US" sz="1400" dirty="0"/>
+          </a:p>
+        </p:txBody>
+      </p:sp>
+      <p:sp>
+        <p:nvSpPr>
+          <p:cNvPr id="6" name="Text 4"/>
+          <p:cNvSpPr/>
+          <p:nvPr/>
+        </p:nvSpPr>
+        <p:spPr>
+          <a:xfrm>
+            <a:off x="406301" y="1496913"/>
+            <a:ext cx="8498026" cy="213271"/>
+          </a:xfrm>
+          <a:prstGeom prst="rect">
+            <a:avLst/>
+          </a:prstGeom>
+          <a:noFill/>
+          <a:ln/>
+        </p:spPr>
+        <p:txBody>
+          <a:bodyPr wrap="square" lIns="0" tIns="0" rIns="0" bIns="0" rtlCol="0" anchor="t"/>
+          <a:lstStyle/>
+          <a:p>
             <a:pPr algn="l" indent="0" marL="0">
               <a:lnSpc>
                 <a:spcPts val="1680"/>
@@ -3027,29 +5742,6 @@
               <a:buNone/>
             </a:pPr>
             <a:r>
-              <a:rPr lang="en-US" sz="1200" b="1" dirty="0">
-                <a:solidFill>
-                  <a:srgbClr val="1C2833"/>
-                </a:solidFill>
-                <a:latin typeface="Arial" pitchFamily="34" charset="0"/>
-                <a:ea typeface="Arial" pitchFamily="34" charset="-122"/>
-                <a:cs typeface="Arial" pitchFamily="34" charset="-120"/>
-              </a:rPr>
-              <a:t>first sentence</a:t>
-            </a:r>
-            <a:pPr algn="l" indent="0" marL="0">
-              <a:lnSpc>
-                <a:spcPts val="1680"/>
-              </a:lnSpc>
-              <a:spcBef>
-                <a:spcPts val="300"/>
-              </a:spcBef>
-              <a:spcAft>
-                <a:spcPts val="300"/>
-              </a:spcAft>
-              <a:buNone/>
-            </a:pPr>
-            <a:r>
               <a:rPr lang="en-US" sz="1200" dirty="0">
                 <a:solidFill>
                   <a:srgbClr val="1C2833"/>
@@ -3058,7 +5750,7 @@
                 <a:ea typeface="Arial" pitchFamily="34" charset="-122"/>
                 <a:cs typeface="Arial" pitchFamily="34" charset="-120"/>
               </a:rPr>
-              <a:t> of your presentation. Final tweaks. If video — finish recording. Bring everything tomorrow.</a:t>
+              <a:t>Students work on their chosen format. Some guidance per format:</a:t>
             </a:r>
             <a:endParaRPr lang="en-US" sz="1200" dirty="0"/>
           </a:p>
@@ -3066,7 +5758,7 @@
       </p:sp>
       <p:sp>
         <p:nvSpPr>
-          <p:cNvPr id="5" name="Text 3"/>
+          <p:cNvPr id="7" name="Text 5"/>
           <p:cNvSpPr/>
           <p:nvPr/>
         </p:nvSpPr>
@@ -3216,7 +5908,7 @@
                 <a:ea typeface="Georgia" pitchFamily="34" charset="-122"/>
                 <a:cs typeface="Georgia" pitchFamily="34" charset="-120"/>
               </a:rPr>
-              <a:t>Differentiation</a:t>
+              <a:t>Core (35 min) — Build + rehearse (cont.)</a:t>
             </a:r>
             <a:endParaRPr lang="en-US" sz="1800" dirty="0"/>
           </a:p>
@@ -3231,7 +5923,7 @@
         <p:spPr>
           <a:xfrm>
             <a:off x="634901" y="883593"/>
-            <a:ext cx="8102798" cy="731341"/>
+            <a:ext cx="8102798" cy="2041624"/>
           </a:xfrm>
           <a:prstGeom prst="rect">
             <a:avLst/>
@@ -3262,7 +5954,7 @@
                 <a:ea typeface="Arial" pitchFamily="34" charset="-122"/>
                 <a:cs typeface="Arial" pitchFamily="34" charset="-120"/>
               </a:rPr>
-              <a:t>One tier up:</a:t>
+              <a:t>Poster (A2 or larger):</a:t>
             </a:r>
             <a:pPr algn="l" indent="0" marL="0">
               <a:lnSpc>
@@ -3282,7 +5974,7 @@
                 <a:ea typeface="Arial" pitchFamily="34" charset="-122"/>
                 <a:cs typeface="Arial" pitchFamily="34" charset="-120"/>
               </a:rPr>
-              <a:t> Add a </a:t>
+              <a:t> Title in large font. 5 day-blocks visible. Each day-block: the change + the concept it touches. Citation in the bottom corner. Use coloured pens for the three </a:t>
             </a:r>
             <a:pPr algn="l" indent="0" marL="0">
               <a:lnSpc>
@@ -3302,7 +5994,7 @@
                 <a:ea typeface="Arial" pitchFamily="34" charset="-122"/>
                 <a:cs typeface="Arial" pitchFamily="34" charset="-120"/>
               </a:rPr>
-              <a:t>modern-science parallel</a:t>
+              <a:t>doṣa</a:t>
             </a:r>
             <a:pPr algn="l" indent="0" marL="0">
               <a:lnSpc>
@@ -3322,7 +6014,7 @@
                 <a:ea typeface="Arial" pitchFamily="34" charset="-122"/>
                 <a:cs typeface="Arial" pitchFamily="34" charset="-120"/>
               </a:rPr>
-              <a:t> (chronobiology / digestion / sleep research) to your presentation. One sentence.</a:t>
+              <a:t>s consistently (e.g. brown for vāta, red for pitta, green for kapha).</a:t>
             </a:r>
             <a:endParaRPr lang="en-US" sz="1200" dirty="0"/>
           </a:p>
@@ -3346,7 +6038,7 @@
                 <a:ea typeface="Arial" pitchFamily="34" charset="-122"/>
                 <a:cs typeface="Arial" pitchFamily="34" charset="-120"/>
               </a:rPr>
-              <a:t>One tier down:</a:t>
+              <a:t>Live demo:</a:t>
             </a:r>
             <a:pPr algn="l" indent="0" marL="0">
               <a:lnSpc>
@@ -3366,7 +6058,135 @@
                 <a:ea typeface="Arial" pitchFamily="34" charset="-122"/>
                 <a:cs typeface="Arial" pitchFamily="34" charset="-120"/>
               </a:rPr>
-              <a:t> Focus on three days, not five. Memorise the artefact's three key points.</a:t>
+              <a:t> Script the 2-minute window. What's the visual? What's the spoken hook? What do you hand around the room?</a:t>
+            </a:r>
+            <a:endParaRPr lang="en-US" sz="1200" dirty="0"/>
+          </a:p>
+          <a:p>
+            <a:pPr algn="l" marL="342900" indent="-342900">
+              <a:lnSpc>
+                <a:spcPts val="1620"/>
+              </a:lnSpc>
+              <a:spcAft>
+                <a:spcPts val="300"/>
+              </a:spcAft>
+              <a:buSzPct val="100000"/>
+              <a:buChar char="•"/>
+            </a:pPr>
+            <a:r>
+              <a:rPr lang="en-US" sz="1200" b="1" dirty="0">
+                <a:solidFill>
+                  <a:srgbClr val="1C2833"/>
+                </a:solidFill>
+                <a:latin typeface="Arial" pitchFamily="34" charset="0"/>
+                <a:ea typeface="Arial" pitchFamily="34" charset="-122"/>
+                <a:cs typeface="Arial" pitchFamily="34" charset="-120"/>
+              </a:rPr>
+              <a:t>Short story (1 page):</a:t>
+            </a:r>
+            <a:pPr algn="l" indent="0" marL="0">
+              <a:lnSpc>
+                <a:spcPts val="1620"/>
+              </a:lnSpc>
+              <a:spcAft>
+                <a:spcPts val="300"/>
+              </a:spcAft>
+              <a:buNone/>
+            </a:pPr>
+            <a:r>
+              <a:rPr lang="en-US" sz="1200" dirty="0">
+                <a:solidFill>
+                  <a:srgbClr val="1C2833"/>
+                </a:solidFill>
+                <a:latin typeface="Arial" pitchFamily="34" charset="0"/>
+                <a:ea typeface="Arial" pitchFamily="34" charset="-122"/>
+                <a:cs typeface="Arial" pitchFamily="34" charset="-120"/>
+              </a:rPr>
+              <a:t> Character × situation × the </a:t>
+            </a:r>
+            <a:pPr algn="l" indent="0" marL="0">
+              <a:lnSpc>
+                <a:spcPts val="1620"/>
+              </a:lnSpc>
+              <a:spcAft>
+                <a:spcPts val="300"/>
+              </a:spcAft>
+              <a:buNone/>
+            </a:pPr>
+            <a:r>
+              <a:rPr lang="en-US" sz="1200" i="1" dirty="0">
+                <a:solidFill>
+                  <a:srgbClr val="1C2833"/>
+                </a:solidFill>
+                <a:latin typeface="Arial" pitchFamily="34" charset="0"/>
+                <a:ea typeface="Arial" pitchFamily="34" charset="-122"/>
+                <a:cs typeface="Arial" pitchFamily="34" charset="-120"/>
+              </a:rPr>
+              <a:t>doṣa</a:t>
+            </a:r>
+            <a:pPr algn="l" indent="0" marL="0">
+              <a:lnSpc>
+                <a:spcPts val="1620"/>
+              </a:lnSpc>
+              <a:spcAft>
+                <a:spcPts val="300"/>
+              </a:spcAft>
+              <a:buNone/>
+            </a:pPr>
+            <a:r>
+              <a:rPr lang="en-US" sz="1200" dirty="0">
+                <a:solidFill>
+                  <a:srgbClr val="1C2833"/>
+                </a:solidFill>
+                <a:latin typeface="Arial" pitchFamily="34" charset="0"/>
+                <a:ea typeface="Arial" pitchFamily="34" charset="-122"/>
+                <a:cs typeface="Arial" pitchFamily="34" charset="-120"/>
+              </a:rPr>
+              <a:t>-aware change × what happened. End with the citation as a footnote.</a:t>
+            </a:r>
+            <a:endParaRPr lang="en-US" sz="1200" dirty="0"/>
+          </a:p>
+          <a:p>
+            <a:pPr algn="l" marL="342900" indent="-342900">
+              <a:lnSpc>
+                <a:spcPts val="1620"/>
+              </a:lnSpc>
+              <a:spcAft>
+                <a:spcPts val="300"/>
+              </a:spcAft>
+              <a:buSzPct val="100000"/>
+              <a:buChar char="•"/>
+            </a:pPr>
+            <a:r>
+              <a:rPr lang="en-US" sz="1200" b="1" dirty="0">
+                <a:solidFill>
+                  <a:srgbClr val="1C2833"/>
+                </a:solidFill>
+                <a:latin typeface="Arial" pitchFamily="34" charset="0"/>
+                <a:ea typeface="Arial" pitchFamily="34" charset="-122"/>
+                <a:cs typeface="Arial" pitchFamily="34" charset="-120"/>
+              </a:rPr>
+              <a:t>90-sec video:</a:t>
+            </a:r>
+            <a:pPr algn="l" indent="0" marL="0">
+              <a:lnSpc>
+                <a:spcPts val="1620"/>
+              </a:lnSpc>
+              <a:spcAft>
+                <a:spcPts val="300"/>
+              </a:spcAft>
+              <a:buNone/>
+            </a:pPr>
+            <a:r>
+              <a:rPr lang="en-US" sz="1200" dirty="0">
+                <a:solidFill>
+                  <a:srgbClr val="1C2833"/>
+                </a:solidFill>
+                <a:latin typeface="Arial" pitchFamily="34" charset="0"/>
+                <a:ea typeface="Arial" pitchFamily="34" charset="-122"/>
+                <a:cs typeface="Arial" pitchFamily="34" charset="-120"/>
+              </a:rPr>
+              <a:t> Storyboard 6 shots. Each ~15 seconds. Practice the script aloud. Recording happens at home tonight; submit by Day 10.</a:t>
             </a:r>
             <a:endParaRPr lang="en-US" sz="1200" dirty="0"/>
           </a:p>
@@ -3524,7 +6344,7 @@
                 <a:ea typeface="Georgia" pitchFamily="34" charset="-122"/>
                 <a:cs typeface="Georgia" pitchFamily="34" charset="-120"/>
               </a:rPr>
-              <a:t>Teacher notes</a:t>
+              <a:t>Core (35 min) — Build + rehearse (cont.)</a:t>
             </a:r>
             <a:endParaRPr lang="en-US" sz="1800" dirty="0"/>
           </a:p>
@@ -3538,8 +6358,8 @@
         </p:nvSpPr>
         <p:spPr>
           <a:xfrm>
-            <a:off x="406301" y="870942"/>
-            <a:ext cx="8498026" cy="639812"/>
+            <a:off x="634901" y="883593"/>
+            <a:ext cx="8102798" cy="731341"/>
           </a:xfrm>
           <a:prstGeom prst="rect">
             <a:avLst/>
@@ -3551,13 +6371,31 @@
           <a:bodyPr wrap="square" lIns="0" tIns="0" rIns="0" bIns="0" rtlCol="0" anchor="t"/>
           <a:lstStyle/>
           <a:p>
-            <a:pPr algn="l" indent="0" marL="0">
-              <a:lnSpc>
-                <a:spcPts val="1680"/>
-              </a:lnSpc>
-              <a:spcBef>
-                <a:spcPts val="300"/>
-              </a:spcBef>
+            <a:pPr algn="l" marL="342900" indent="-342900">
+              <a:lnSpc>
+                <a:spcPts val="1620"/>
+              </a:lnSpc>
+              <a:spcAft>
+                <a:spcPts val="300"/>
+              </a:spcAft>
+              <a:buSzPct val="100000"/>
+              <a:buChar char="•"/>
+            </a:pPr>
+            <a:r>
+              <a:rPr lang="en-US" sz="1200" b="1" dirty="0">
+                <a:solidFill>
+                  <a:srgbClr val="1C2833"/>
+                </a:solidFill>
+                <a:latin typeface="Arial" pitchFamily="34" charset="0"/>
+                <a:ea typeface="Arial" pitchFamily="34" charset="-122"/>
+                <a:cs typeface="Arial" pitchFamily="34" charset="-120"/>
+              </a:rPr>
+              <a:t>Infographic:</a:t>
+            </a:r>
+            <a:pPr algn="l" indent="0" marL="0">
+              <a:lnSpc>
+                <a:spcPts val="1620"/>
+              </a:lnSpc>
               <a:spcAft>
                 <a:spcPts val="300"/>
               </a:spcAft>
@@ -3572,7 +6410,91 @@
                 <a:ea typeface="Arial" pitchFamily="34" charset="-122"/>
                 <a:cs typeface="Arial" pitchFamily="34" charset="-120"/>
               </a:rPr>
-              <a:t>– Some students freeze in the build phase. Hand them a poster paper and a marker and ask: "what's the first thing you'd draw?" Get them moving. – Watch for groups where one student does all the work. Equalise contribution. – Last-minute additions ("can I also include this herb?") — refuse politely. The scope was set.</a:t>
+              <a:t> A clear visual flow — top to bottom or left to right. Use the day-clock (Day 5) or quality-table (Day 4) as a starting visual.</a:t>
+            </a:r>
+            <a:endParaRPr lang="en-US" sz="1200" dirty="0"/>
+          </a:p>
+          <a:p>
+            <a:pPr algn="l" marL="342900" indent="-342900">
+              <a:lnSpc>
+                <a:spcPts val="1620"/>
+              </a:lnSpc>
+              <a:spcAft>
+                <a:spcPts val="300"/>
+              </a:spcAft>
+              <a:buSzPct val="100000"/>
+              <a:buChar char="•"/>
+            </a:pPr>
+            <a:r>
+              <a:rPr lang="en-US" sz="1200" b="1" dirty="0">
+                <a:solidFill>
+                  <a:srgbClr val="1C2833"/>
+                </a:solidFill>
+                <a:latin typeface="Arial" pitchFamily="34" charset="0"/>
+                <a:ea typeface="Arial" pitchFamily="34" charset="-122"/>
+                <a:cs typeface="Arial" pitchFamily="34" charset="-120"/>
+              </a:rPr>
+              <a:t>Song / poem:</a:t>
+            </a:r>
+            <a:pPr algn="l" indent="0" marL="0">
+              <a:lnSpc>
+                <a:spcPts val="1620"/>
+              </a:lnSpc>
+              <a:spcAft>
+                <a:spcPts val="300"/>
+              </a:spcAft>
+              <a:buNone/>
+            </a:pPr>
+            <a:r>
+              <a:rPr lang="en-US" sz="1200" dirty="0">
+                <a:solidFill>
+                  <a:srgbClr val="1C2833"/>
+                </a:solidFill>
+                <a:latin typeface="Arial" pitchFamily="34" charset="0"/>
+                <a:ea typeface="Arial" pitchFamily="34" charset="-122"/>
+                <a:cs typeface="Arial" pitchFamily="34" charset="-120"/>
+              </a:rPr>
+              <a:t> Memorise 4 lines that name all three </a:t>
+            </a:r>
+            <a:pPr algn="l" indent="0" marL="0">
+              <a:lnSpc>
+                <a:spcPts val="1620"/>
+              </a:lnSpc>
+              <a:spcAft>
+                <a:spcPts val="300"/>
+              </a:spcAft>
+              <a:buNone/>
+            </a:pPr>
+            <a:r>
+              <a:rPr lang="en-US" sz="1200" i="1" dirty="0">
+                <a:solidFill>
+                  <a:srgbClr val="1C2833"/>
+                </a:solidFill>
+                <a:latin typeface="Arial" pitchFamily="34" charset="0"/>
+                <a:ea typeface="Arial" pitchFamily="34" charset="-122"/>
+                <a:cs typeface="Arial" pitchFamily="34" charset="-120"/>
+              </a:rPr>
+              <a:t>doṣa</a:t>
+            </a:r>
+            <a:pPr algn="l" indent="0" marL="0">
+              <a:lnSpc>
+                <a:spcPts val="1620"/>
+              </a:lnSpc>
+              <a:spcAft>
+                <a:spcPts val="300"/>
+              </a:spcAft>
+              <a:buNone/>
+            </a:pPr>
+            <a:r>
+              <a:rPr lang="en-US" sz="1200" dirty="0">
+                <a:solidFill>
+                  <a:srgbClr val="1C2833"/>
+                </a:solidFill>
+                <a:latin typeface="Arial" pitchFamily="34" charset="0"/>
+                <a:ea typeface="Arial" pitchFamily="34" charset="-122"/>
+                <a:cs typeface="Arial" pitchFamily="34" charset="-120"/>
+              </a:rPr>
+              <a:t>s. Set them in a meter.</a:t>
             </a:r>
             <a:endParaRPr lang="en-US" sz="1200" dirty="0"/>
           </a:p>
@@ -3730,7 +6652,7 @@
                 <a:ea typeface="Georgia" pitchFamily="34" charset="-122"/>
                 <a:cs typeface="Georgia" pitchFamily="34" charset="-120"/>
               </a:rPr>
-              <a:t>Citation(s) used in this lesson</a:t>
+              <a:t>Core (35 min) — Build + rehearse (cont.)</a:t>
             </a:r>
             <a:endParaRPr lang="en-US" sz="1800" dirty="0"/>
           </a:p>
@@ -3770,6 +6692,52 @@
               <a:buNone/>
             </a:pPr>
             <a:r>
+              <a:rPr lang="en-US" sz="1200" b="1" dirty="0">
+                <a:solidFill>
+                  <a:srgbClr val="1C2833"/>
+                </a:solidFill>
+                <a:latin typeface="Arial" pitchFamily="34" charset="0"/>
+                <a:ea typeface="Arial" pitchFamily="34" charset="-122"/>
+                <a:cs typeface="Arial" pitchFamily="34" charset="-120"/>
+              </a:rPr>
+              <a:t>Teacher targets to intervene on:</a:t>
+            </a:r>
+            <a:endParaRPr lang="en-US" sz="1200" dirty="0"/>
+          </a:p>
+        </p:txBody>
+      </p:sp>
+      <p:sp>
+        <p:nvSpPr>
+          <p:cNvPr id="5" name="Text 3"/>
+          <p:cNvSpPr/>
+          <p:nvPr/>
+        </p:nvSpPr>
+        <p:spPr>
+          <a:xfrm>
+            <a:off x="634901" y="1173063"/>
+            <a:ext cx="8102798" cy="769441"/>
+          </a:xfrm>
+          <a:prstGeom prst="rect">
+            <a:avLst/>
+          </a:prstGeom>
+          <a:noFill/>
+          <a:ln/>
+        </p:spPr>
+        <p:txBody>
+          <a:bodyPr wrap="square" lIns="0" tIns="0" rIns="0" bIns="0" rtlCol="0" anchor="t"/>
+          <a:lstStyle/>
+          <a:p>
+            <a:pPr algn="l" marL="342900" indent="-342900">
+              <a:lnSpc>
+                <a:spcPts val="1620"/>
+              </a:lnSpc>
+              <a:spcAft>
+                <a:spcPts val="300"/>
+              </a:spcAft>
+              <a:buSzPct val="100000"/>
+              <a:buChar char="•"/>
+            </a:pPr>
+            <a:r>
               <a:rPr lang="en-US" sz="1200" dirty="0">
                 <a:solidFill>
                   <a:srgbClr val="1C2833"/>
@@ -3778,15 +6746,148 @@
                 <a:ea typeface="Arial" pitchFamily="34" charset="-122"/>
                 <a:cs typeface="Arial" pitchFamily="34" charset="-120"/>
               </a:rPr>
-              <a:t>– No new citations.</a:t>
+              <a:t>Plans without a citation — flag immediately.</a:t>
             </a:r>
             <a:endParaRPr lang="en-US" sz="1200" dirty="0"/>
           </a:p>
-        </p:txBody>
-      </p:sp>
-      <p:sp>
-        <p:nvSpPr>
-          <p:cNvPr id="5" name="Text 3"/>
+          <a:p>
+            <a:pPr algn="l" marL="342900" indent="-342900">
+              <a:lnSpc>
+                <a:spcPts val="1620"/>
+              </a:lnSpc>
+              <a:spcAft>
+                <a:spcPts val="300"/>
+              </a:spcAft>
+              <a:buSzPct val="100000"/>
+              <a:buChar char="•"/>
+            </a:pPr>
+            <a:r>
+              <a:rPr lang="en-US" sz="1200" dirty="0">
+                <a:solidFill>
+                  <a:srgbClr val="1C2833"/>
+                </a:solidFill>
+                <a:latin typeface="Arial" pitchFamily="34" charset="0"/>
+                <a:ea typeface="Arial" pitchFamily="34" charset="-122"/>
+                <a:cs typeface="Arial" pitchFamily="34" charset="-120"/>
+              </a:rPr>
+              <a:t>Plans with prescriptive language ("you should eat X") — soften to observational ("I'll try X this week").</a:t>
+            </a:r>
+            <a:endParaRPr lang="en-US" sz="1200" dirty="0"/>
+          </a:p>
+          <a:p>
+            <a:pPr algn="l" marL="342900" indent="-342900">
+              <a:lnSpc>
+                <a:spcPts val="1620"/>
+              </a:lnSpc>
+              <a:spcAft>
+                <a:spcPts val="300"/>
+              </a:spcAft>
+              <a:buSzPct val="100000"/>
+              <a:buChar char="•"/>
+            </a:pPr>
+            <a:r>
+              <a:rPr lang="en-US" sz="1200" dirty="0">
+                <a:solidFill>
+                  <a:srgbClr val="1C2833"/>
+                </a:solidFill>
+                <a:latin typeface="Arial" pitchFamily="34" charset="0"/>
+                <a:ea typeface="Arial" pitchFamily="34" charset="-122"/>
+                <a:cs typeface="Arial" pitchFamily="34" charset="-120"/>
+              </a:rPr>
+              <a:t>Plans that miss the </a:t>
+            </a:r>
+            <a:pPr algn="l" indent="0" marL="0">
+              <a:lnSpc>
+                <a:spcPts val="1620"/>
+              </a:lnSpc>
+              <a:spcAft>
+                <a:spcPts val="300"/>
+              </a:spcAft>
+              <a:buNone/>
+            </a:pPr>
+            <a:r>
+              <a:rPr lang="en-US" sz="1200" i="1" dirty="0">
+                <a:solidFill>
+                  <a:srgbClr val="1C2833"/>
+                </a:solidFill>
+                <a:latin typeface="Arial" pitchFamily="34" charset="0"/>
+                <a:ea typeface="Arial" pitchFamily="34" charset="-122"/>
+                <a:cs typeface="Arial" pitchFamily="34" charset="-120"/>
+              </a:rPr>
+              <a:t>doṣa-aware</a:t>
+            </a:r>
+            <a:pPr algn="l" indent="0" marL="0">
+              <a:lnSpc>
+                <a:spcPts val="1620"/>
+              </a:lnSpc>
+              <a:spcAft>
+                <a:spcPts val="300"/>
+              </a:spcAft>
+              <a:buNone/>
+            </a:pPr>
+            <a:r>
+              <a:rPr lang="en-US" sz="1200" dirty="0">
+                <a:solidFill>
+                  <a:srgbClr val="1C2833"/>
+                </a:solidFill>
+                <a:latin typeface="Arial" pitchFamily="34" charset="0"/>
+                <a:ea typeface="Arial" pitchFamily="34" charset="-122"/>
+                <a:cs typeface="Arial" pitchFamily="34" charset="-120"/>
+              </a:rPr>
+              <a:t> link — add a "concept" arrow.</a:t>
+            </a:r>
+            <a:endParaRPr lang="en-US" sz="1200" dirty="0"/>
+          </a:p>
+        </p:txBody>
+      </p:sp>
+      <p:sp>
+        <p:nvSpPr>
+          <p:cNvPr id="6" name="Text 4"/>
+          <p:cNvSpPr/>
+          <p:nvPr/>
+        </p:nvSpPr>
+        <p:spPr>
+          <a:xfrm>
+            <a:off x="406301" y="2069455"/>
+            <a:ext cx="8498026" cy="209550"/>
+          </a:xfrm>
+          <a:prstGeom prst="rect">
+            <a:avLst/>
+          </a:prstGeom>
+          <a:noFill/>
+          <a:ln/>
+        </p:spPr>
+        <p:txBody>
+          <a:bodyPr wrap="square" lIns="0" tIns="0" rIns="0" bIns="0" rtlCol="0" anchor="t"/>
+          <a:lstStyle/>
+          <a:p>
+            <a:pPr algn="l" indent="0" marL="0">
+              <a:spcBef>
+                <a:spcPts val="600"/>
+              </a:spcBef>
+              <a:spcAft>
+                <a:spcPts val="400"/>
+              </a:spcAft>
+              <a:buNone/>
+            </a:pPr>
+            <a:r>
+              <a:rPr lang="en-US" sz="1400" b="1" dirty="0">
+                <a:solidFill>
+                  <a:srgbClr val="1C2833"/>
+                </a:solidFill>
+                <a:latin typeface="Arial" pitchFamily="34" charset="0"/>
+                <a:ea typeface="Arial" pitchFamily="34" charset="-122"/>
+                <a:cs typeface="Arial" pitchFamily="34" charset="-120"/>
+              </a:rPr>
+              <a:t>Phase B — Rehearse (10 min)</a:t>
+            </a:r>
+            <a:endParaRPr lang="en-US" sz="1400" dirty="0"/>
+          </a:p>
+        </p:txBody>
+      </p:sp>
+      <p:sp>
+        <p:nvSpPr>
+          <p:cNvPr id="7" name="Text 5"/>
           <p:cNvSpPr/>
           <p:nvPr/>
         </p:nvSpPr>
